--- a/OPT_PLIC/ro/fisiere/C01.pptx
+++ b/OPT_PLIC/ro/fisiere/C01.pptx
@@ -54,8 +54,6 @@
     <p:sldId id="300" r:id="rId46"/>
     <p:sldId id="301" r:id="rId47"/>
     <p:sldId id="302" r:id="rId48"/>
-    <p:sldId id="303" r:id="rId49"/>
-    <p:sldId id="304" r:id="rId50"/>
     <p:sldId id="305" r:id="rId51"/>
     <p:sldId id="306" r:id="rId52"/>
     <p:sldId id="307" r:id="rId53"/>
@@ -63,6 +61,7 @@
     <p:sldId id="309" r:id="rId55"/>
     <p:sldId id="310" r:id="rId56"/>
     <p:sldId id="311" r:id="rId57"/>
+    <p:sldId id="314" r:id="rId65"/>
   </p:sldIdLst>
   <p:notesMasterIdLst>
     <p:notesMasterId r:id="rId58"/>
@@ -4191,182 +4190,6 @@
             <a:fld id="{F7021451-1387-4CA6-816F-3879F97B5CBC}" type="slidenum">
               <a:rPr lang="en-US"/>
               <a:t>47</a:t>
-            </a:fld>
-            <a:endParaRPr lang="en-US"/>
-          </a:p>
-        </p:txBody>
-      </p:sp>
-    </p:spTree>
-    <p:extLst>
-      <p:ext uri="{BB962C8B-B14F-4D97-AF65-F5344CB8AC3E}">
-        <p14:creationId xmlns:p14="http://schemas.microsoft.com/office/powerpoint/2010/main" val="1024086991"/>
-      </p:ext>
-    </p:extLst>
-  </p:cSld>
-  <p:clrMapOvr>
-    <a:masterClrMapping/>
-  </p:clrMapOvr>
-</p:notes>
-</file>
-
-<file path=ppt/notesSlides/notesSlide48.xml><?xml version="1.0" encoding="utf-8"?>
-<p:notes xmlns:a="http://schemas.openxmlformats.org/drawingml/2006/main" xmlns:r="http://schemas.openxmlformats.org/officeDocument/2006/relationships" xmlns:p="http://schemas.openxmlformats.org/presentationml/2006/main">
-  <p:cSld>
-    <p:spTree>
-      <p:nvGrpSpPr>
-        <p:cNvPr id="1" name=""/>
-        <p:cNvGrpSpPr/>
-        <p:nvPr/>
-      </p:nvGrpSpPr>
-      <p:grpSpPr>
-        <a:xfrm>
-          <a:off x="0" y="0"/>
-          <a:ext cx="0" cy="0"/>
-          <a:chOff x="0" y="0"/>
-          <a:chExt cx="0" cy="0"/>
-        </a:xfrm>
-      </p:grpSpPr>
-      <p:sp>
-        <p:nvSpPr>
-          <p:cNvPr id="2" name="Slide Image Placeholder 1"/>
-          <p:cNvSpPr>
-            <a:spLocks noGrp="1" noRot="1" noChangeAspect="1"/>
-          </p:cNvSpPr>
-          <p:nvPr>
-            <p:ph type="sldImg"/>
-          </p:nvPr>
-        </p:nvSpPr>
-        <p:spPr/>
-      </p:sp>
-      <p:sp>
-        <p:nvSpPr>
-          <p:cNvPr id="3" name="Notes Placeholder 2"/>
-          <p:cNvSpPr>
-            <a:spLocks noGrp="1"/>
-          </p:cNvSpPr>
-          <p:nvPr>
-            <p:ph type="body" idx="1"/>
-          </p:nvPr>
-        </p:nvSpPr>
-        <p:spPr/>
-        <p:txBody>
-          <a:bodyPr/>
-          <a:lstStyle/>
-          <a:p>
-            <a:r>
-              <a:rPr lang="en-US" dirty="0"/>
-              <a:t/>
-            </a:r>
-            <a:endParaRPr lang="en-US" dirty="0"/>
-          </a:p>
-        </p:txBody>
-      </p:sp>
-      <p:sp>
-        <p:nvSpPr>
-          <p:cNvPr id="4" name="Slide Number Placeholder 3"/>
-          <p:cNvSpPr>
-            <a:spLocks noGrp="1"/>
-          </p:cNvSpPr>
-          <p:nvPr>
-            <p:ph type="sldNum" sz="quarter" idx="10"/>
-          </p:nvPr>
-        </p:nvSpPr>
-        <p:spPr/>
-        <p:txBody>
-          <a:bodyPr/>
-          <a:lstStyle/>
-          <a:p>
-            <a:fld id="{F7021451-1387-4CA6-816F-3879F97B5CBC}" type="slidenum">
-              <a:rPr lang="en-US"/>
-              <a:t>48</a:t>
-            </a:fld>
-            <a:endParaRPr lang="en-US"/>
-          </a:p>
-        </p:txBody>
-      </p:sp>
-    </p:spTree>
-    <p:extLst>
-      <p:ext uri="{BB962C8B-B14F-4D97-AF65-F5344CB8AC3E}">
-        <p14:creationId xmlns:p14="http://schemas.microsoft.com/office/powerpoint/2010/main" val="1024086991"/>
-      </p:ext>
-    </p:extLst>
-  </p:cSld>
-  <p:clrMapOvr>
-    <a:masterClrMapping/>
-  </p:clrMapOvr>
-</p:notes>
-</file>
-
-<file path=ppt/notesSlides/notesSlide49.xml><?xml version="1.0" encoding="utf-8"?>
-<p:notes xmlns:a="http://schemas.openxmlformats.org/drawingml/2006/main" xmlns:r="http://schemas.openxmlformats.org/officeDocument/2006/relationships" xmlns:p="http://schemas.openxmlformats.org/presentationml/2006/main">
-  <p:cSld>
-    <p:spTree>
-      <p:nvGrpSpPr>
-        <p:cNvPr id="1" name=""/>
-        <p:cNvGrpSpPr/>
-        <p:nvPr/>
-      </p:nvGrpSpPr>
-      <p:grpSpPr>
-        <a:xfrm>
-          <a:off x="0" y="0"/>
-          <a:ext cx="0" cy="0"/>
-          <a:chOff x="0" y="0"/>
-          <a:chExt cx="0" cy="0"/>
-        </a:xfrm>
-      </p:grpSpPr>
-      <p:sp>
-        <p:nvSpPr>
-          <p:cNvPr id="2" name="Slide Image Placeholder 1"/>
-          <p:cNvSpPr>
-            <a:spLocks noGrp="1" noRot="1" noChangeAspect="1"/>
-          </p:cNvSpPr>
-          <p:nvPr>
-            <p:ph type="sldImg"/>
-          </p:nvPr>
-        </p:nvSpPr>
-        <p:spPr/>
-      </p:sp>
-      <p:sp>
-        <p:nvSpPr>
-          <p:cNvPr id="3" name="Notes Placeholder 2"/>
-          <p:cNvSpPr>
-            <a:spLocks noGrp="1"/>
-          </p:cNvSpPr>
-          <p:nvPr>
-            <p:ph type="body" idx="1"/>
-          </p:nvPr>
-        </p:nvSpPr>
-        <p:spPr/>
-        <p:txBody>
-          <a:bodyPr/>
-          <a:lstStyle/>
-          <a:p>
-            <a:r>
-              <a:rPr lang="en-US" dirty="0"/>
-              <a:t/>
-            </a:r>
-            <a:endParaRPr lang="en-US" dirty="0"/>
-          </a:p>
-        </p:txBody>
-      </p:sp>
-      <p:sp>
-        <p:nvSpPr>
-          <p:cNvPr id="4" name="Slide Number Placeholder 3"/>
-          <p:cNvSpPr>
-            <a:spLocks noGrp="1"/>
-          </p:cNvSpPr>
-          <p:nvPr>
-            <p:ph type="sldNum" sz="quarter" idx="10"/>
-          </p:nvPr>
-        </p:nvSpPr>
-        <p:spPr/>
-        <p:txBody>
-          <a:bodyPr/>
-          <a:lstStyle/>
-          <a:p>
-            <a:fld id="{F7021451-1387-4CA6-816F-3879F97B5CBC}" type="slidenum">
-              <a:rPr lang="en-US"/>
-              <a:t>49</a:t>
             </a:fld>
             <a:endParaRPr lang="en-US"/>
           </a:p>
@@ -6758,7 +6581,7 @@
                 <a:ea typeface="Palatino Linotype" pitchFamily="34" charset="-122"/>
                 <a:cs typeface="Palatino Linotype" pitchFamily="34" charset="-120"/>
               </a:rPr>
-              <a:t>NOȚIUNEA 3 / 6</a:t>
+              <a:t>NOȚIUNEA 3 / 6 · PENTRU CURIOȘI</a:t>
             </a:r>
             <a:endParaRPr lang="en-US" sz="1100" dirty="0"/>
           </a:p>
@@ -7095,7 +6918,7 @@
                 <a:ea typeface="Palatino Linotype" pitchFamily="34" charset="-122"/>
                 <a:cs typeface="Palatino Linotype" pitchFamily="34" charset="-120"/>
               </a:rPr>
-              <a:t>NOȚIUNEA 4 / 6</a:t>
+              <a:t>NOȚIUNEA 4 / 6 · PENTRU CURIOȘI</a:t>
             </a:r>
             <a:endParaRPr lang="en-US" sz="1100" dirty="0"/>
           </a:p>
@@ -7432,7 +7255,7 @@
                 <a:ea typeface="Palatino Linotype" pitchFamily="34" charset="-122"/>
                 <a:cs typeface="Palatino Linotype" pitchFamily="34" charset="-120"/>
               </a:rPr>
-              <a:t>NOȚIUNEA 5 / 6</a:t>
+              <a:t>NOȚIUNEA 5 / 6 · PENTRU CURIOȘI</a:t>
             </a:r>
             <a:endParaRPr lang="en-US" sz="1100" dirty="0"/>
           </a:p>
@@ -7769,7 +7592,7 @@
                 <a:ea typeface="Palatino Linotype" pitchFamily="34" charset="-122"/>
                 <a:cs typeface="Palatino Linotype" pitchFamily="34" charset="-120"/>
               </a:rPr>
-              <a:t>NOȚIUNEA 6 / 6</a:t>
+              <a:t>NOȚIUNEA 6 / 6 · PENTRU CURIOȘI</a:t>
             </a:r>
             <a:endParaRPr lang="en-US" sz="1100" dirty="0"/>
           </a:p>
@@ -8704,7 +8527,7 @@
                 <a:ea typeface="Palatino Linotype" pitchFamily="34" charset="-122"/>
                 <a:cs typeface="Palatino Linotype" pitchFamily="34" charset="-120"/>
               </a:rPr>
-              <a:t>02</a:t>
+              <a:t>2</a:t>
             </a:r>
             <a:endParaRPr lang="en-US" sz="13500" dirty="0"/>
           </a:p>
@@ -8814,7 +8637,7 @@
                 <a:ea typeface="Palatino Linotype" pitchFamily="34" charset="-122"/>
                 <a:cs typeface="Palatino Linotype" pitchFamily="34" charset="-120"/>
               </a:rPr>
-              <a:t>Șapte procese care se măsoară cu instrumente diferite și nu se însumează. Plus caracteristicile care fac sectorul sanitar vulnerabil structural și mecanismul, pe două niveluri.</a:t>
+              <a:t>Șase categorii care se măsoară cu instrumente diferite și nu se însumează. Plus caracteristicile care fac sectorul sanitar vulnerabil structural și mecanismul, pe două niveluri.</a:t>
             </a:r>
             <a:endParaRPr lang="en-US" sz="1500" dirty="0"/>
           </a:p>
@@ -8924,7 +8747,7 @@
                 <a:ea typeface="Palatino Linotype" pitchFamily="34" charset="-122"/>
                 <a:cs typeface="Palatino Linotype" pitchFamily="34" charset="-120"/>
               </a:rPr>
-              <a:t>Șapte procese, nu cinci categorii</a:t>
+              <a:t>Șase categorii, nu o cantitate</a:t>
             </a:r>
             <a:endParaRPr lang="en-US" sz="3100" dirty="0"/>
           </a:p>
@@ -8963,7 +8786,7 @@
                 <a:ea typeface="Palatino Linotype" pitchFamily="34" charset="-122"/>
                 <a:cs typeface="Palatino Linotype" pitchFamily="34" charset="-120"/>
               </a:rPr>
-              <a:t>Tipologia standard nu clasifică după felul faptei, ci după locul din proces în care ea devine posibilă.</a:t>
+              <a:t>Tipologia Uniunii Europene (2013, actualizată în 2017) grupează corupția din sănătate în șase categorii, pentru analiză, practică și politici.</a:t>
             </a:r>
             <a:endParaRPr lang="en-US" sz="1450" dirty="0"/>
           </a:p>
@@ -9002,7 +8825,7 @@
                 <a:ea typeface="Palatino Linotype" pitchFamily="34" charset="-122"/>
                 <a:cs typeface="Palatino Linotype" pitchFamily="34" charset="-120"/>
               </a:rPr>
-              <a:t>ARIA SAU PROCESUL</a:t>
+              <a:t>CATEGORIA</a:t>
             </a:r>
             <a:endParaRPr lang="en-US" sz="1050" dirty="0"/>
           </a:p>
@@ -9041,7 +8864,7 @@
                 <a:ea typeface="Palatino Linotype" pitchFamily="34" charset="-122"/>
                 <a:cs typeface="Palatino Linotype" pitchFamily="34" charset="-120"/>
               </a:rPr>
-              <a:t>CE SE ÎNTÂMPLĂ</a:t>
+              <a:t>CE CUPRINDE</a:t>
             </a:r>
             <a:endParaRPr lang="en-US" sz="1050" dirty="0"/>
           </a:p>
@@ -9153,7 +8976,7 @@
                 <a:ea typeface="Palatino Linotype" pitchFamily="34" charset="-122"/>
                 <a:cs typeface="Palatino Linotype" pitchFamily="34" charset="-120"/>
               </a:rPr>
-              <a:t>Construcția unităților</a:t>
+              <a:t>Mita în furnizarea serviciilor medicale</a:t>
             </a:r>
             <a:endParaRPr lang="en-US" sz="1250" dirty="0"/>
           </a:p>
@@ -9195,7 +9018,7 @@
                 <a:ea typeface="Palatino Linotype" pitchFamily="34" charset="-122"/>
                 <a:cs typeface="Palatino Linotype" pitchFamily="34" charset="-120"/>
               </a:rPr>
-              <a:t>Mită și considerente politice în contractare</a:t>
+              <a:t>Plăți informale oferite de pacienți sau cerute de prestatori</a:t>
             </a:r>
             <a:endParaRPr lang="en-US" sz="1250" dirty="0"/>
           </a:p>
@@ -9237,7 +9060,7 @@
                 <a:ea typeface="Palatino Linotype" pitchFamily="34" charset="-122"/>
                 <a:cs typeface="Palatino Linotype" pitchFamily="34" charset="-120"/>
               </a:rPr>
-              <a:t>—</a:t>
+              <a:t>prima, a șasea</a:t>
             </a:r>
             <a:endParaRPr lang="en-US" sz="1250" dirty="0"/>
           </a:p>
@@ -9279,7 +9102,7 @@
                 <a:ea typeface="Palatino Linotype" pitchFamily="34" charset="-122"/>
                 <a:cs typeface="Palatino Linotype" pitchFamily="34" charset="-120"/>
               </a:rPr>
-              <a:t>Achiziția de echipamente</a:t>
+              <a:t>Corupția în achiziții</a:t>
             </a:r>
             <a:endParaRPr lang="en-US" sz="1250" dirty="0"/>
           </a:p>
@@ -9321,7 +9144,7 @@
                 <a:ea typeface="Palatino Linotype" pitchFamily="34" charset="-122"/>
                 <a:cs typeface="Palatino Linotype" pitchFamily="34" charset="-120"/>
               </a:rPr>
-              <a:t>Influențarea specificațiilor; înțelegeri la licitație</a:t>
+              <a:t>Pe tot ciclul licitației: mită, înțelegeri, favoritism, facturi false</a:t>
             </a:r>
             <a:endParaRPr lang="en-US" sz="1250" dirty="0"/>
           </a:p>
@@ -9363,7 +9186,7 @@
                 <a:ea typeface="Palatino Linotype" pitchFamily="34" charset="-122"/>
                 <a:cs typeface="Palatino Linotype" pitchFamily="34" charset="-120"/>
               </a:rPr>
-              <a:t>2</a:t>
+              <a:t>a doua</a:t>
             </a:r>
             <a:endParaRPr lang="en-US" sz="1250" dirty="0"/>
           </a:p>
@@ -9436,7 +9259,7 @@
                 <a:ea typeface="Palatino Linotype" pitchFamily="34" charset="-122"/>
                 <a:cs typeface="Palatino Linotype" pitchFamily="34" charset="-120"/>
               </a:rPr>
-              <a:t>Distribuția medicamentelor</a:t>
+              <a:t>Relații de marketing nepotrivite</a:t>
             </a:r>
             <a:endParaRPr lang="en-US" sz="1250" dirty="0"/>
           </a:p>
@@ -9478,7 +9301,7 @@
                 <a:ea typeface="Palatino Linotype" pitchFamily="34" charset="-122"/>
                 <a:cs typeface="Palatino Linotype" pitchFamily="34" charset="-120"/>
               </a:rPr>
-              <a:t>Furt, deturnare, vânzarea a ce trebuia gratuit</a:t>
+              <a:t>Cadouri, sponsorizări sau onorarii de la industrie care pot distorsiona deciziile</a:t>
             </a:r>
             <a:endParaRPr lang="en-US" sz="1250" dirty="0"/>
           </a:p>
@@ -9520,7 +9343,7 @@
                 <a:ea typeface="Palatino Linotype" pitchFamily="34" charset="-122"/>
                 <a:cs typeface="Palatino Linotype" pitchFamily="34" charset="-120"/>
               </a:rPr>
-              <a:t>—</a:t>
+              <a:t>a treia</a:t>
             </a:r>
             <a:endParaRPr lang="en-US" sz="1250" dirty="0"/>
           </a:p>
@@ -9562,7 +9385,7 @@
                 <a:ea typeface="Palatino Linotype" pitchFamily="34" charset="-122"/>
                 <a:cs typeface="Palatino Linotype" pitchFamily="34" charset="-120"/>
               </a:rPr>
-              <a:t>Reglementarea calității</a:t>
+              <a:t>Abuzul de poziții înalte</a:t>
             </a:r>
             <a:endParaRPr lang="en-US" sz="1250" dirty="0"/>
           </a:p>
@@ -9604,7 +9427,7 @@
                 <a:ea typeface="Palatino Linotype" pitchFamily="34" charset="-122"/>
                 <a:cs typeface="Palatino Linotype" pitchFamily="34" charset="-120"/>
               </a:rPr>
-              <a:t>Mită pentru autorizare; influențarea inspecțiilor</a:t>
+              <a:t>Captura reglementării, traficul de influență, conflictele de interese, nepotismul</a:t>
             </a:r>
             <a:endParaRPr lang="en-US" sz="1250" dirty="0"/>
           </a:p>
@@ -9646,7 +9469,7 @@
                 <a:ea typeface="Palatino Linotype" pitchFamily="34" charset="-122"/>
                 <a:cs typeface="Palatino Linotype" pitchFamily="34" charset="-120"/>
               </a:rPr>
-              <a:t>3</a:t>
+              <a:t>a treia</a:t>
             </a:r>
             <a:endParaRPr lang="en-US" sz="1250" dirty="0"/>
           </a:p>
@@ -9719,7 +9542,7 @@
                 <a:ea typeface="Palatino Linotype" pitchFamily="34" charset="-122"/>
                 <a:cs typeface="Palatino Linotype" pitchFamily="34" charset="-120"/>
               </a:rPr>
-              <a:t>Formarea profesioniștilor</a:t>
+              <a:t>Cereri de rambursare nejustificate</a:t>
             </a:r>
             <a:endParaRPr lang="en-US" sz="1250" dirty="0"/>
           </a:p>
@@ -9761,7 +9584,7 @@
                 <a:ea typeface="Palatino Linotype" pitchFamily="34" charset="-122"/>
                 <a:cs typeface="Palatino Linotype" pitchFamily="34" charset="-120"/>
               </a:rPr>
-              <a:t>Mită pentru un loc sau pentru o notă; nepotism</a:t>
+              <a:t>Supracodificarea; decontarea unor tratamente inutile sau neefectuate</a:t>
             </a:r>
             <a:endParaRPr lang="en-US" sz="1250" dirty="0"/>
           </a:p>
@@ -9845,7 +9668,7 @@
                 <a:ea typeface="Palatino Linotype" pitchFamily="34" charset="-122"/>
                 <a:cs typeface="Palatino Linotype" pitchFamily="34" charset="-120"/>
               </a:rPr>
-              <a:t>Cercetarea medicală</a:t>
+              <a:t>Frauda și delapidarea medicamentelor și dispozitivelor</a:t>
             </a:r>
             <a:endParaRPr lang="en-US" sz="1250" dirty="0"/>
           </a:p>
@@ -9887,7 +9710,7 @@
                 <a:ea typeface="Palatino Linotype" pitchFamily="34" charset="-122"/>
                 <a:cs typeface="Palatino Linotype" pitchFamily="34" charset="-120"/>
               </a:rPr>
-              <a:t>Pseudostudii de marketing; consimțământ superficial</a:t>
+              <a:t>Vânzarea în folos privat a medicamentelor publice; medicamente contrafăcute</a:t>
             </a:r>
             <a:endParaRPr lang="en-US" sz="1250" dirty="0"/>
           </a:p>
@@ -9929,164 +9752,7 @@
                 <a:ea typeface="Palatino Linotype" pitchFamily="34" charset="-122"/>
                 <a:cs typeface="Palatino Linotype" pitchFamily="34" charset="-120"/>
               </a:rPr>
-              <a:t>3</a:t>
-            </a:r>
-            <a:endParaRPr lang="en-US" sz="1250" dirty="0"/>
-          </a:p>
-        </p:txBody>
-      </p:sp>
-      <p:sp>
-        <p:nvSpPr>
-          <p:cNvPr id="29" name="Shape 27"/>
-          <p:cNvSpPr/>
-          <p:nvPr/>
-        </p:nvSpPr>
-        <p:spPr>
-          <a:xfrm>
-            <a:off x="594360" y="5577840"/>
-            <a:ext cx="10972800" cy="466344"/>
-          </a:xfrm>
-          <a:prstGeom prst="roundRect">
-            <a:avLst>
-              <a:gd name="adj" fmla="val 17647"/>
-            </a:avLst>
-          </a:prstGeom>
-          <a:solidFill>
-            <a:srgbClr val="ECEAE4"/>
-          </a:solidFill>
-          <a:ln w="12700">
-            <a:solidFill>
-              <a:srgbClr val="ECEAE4"/>
-            </a:solidFill>
-            <a:prstDash val="solid"/>
-          </a:ln>
-        </p:spPr>
-        <p:txBody>
-          <a:bodyPr/>
-          <a:p/>
-        </p:txBody>
-      </p:sp>
-      <p:sp>
-        <p:nvSpPr>
-          <p:cNvPr id="30" name="Text 28"/>
-          <p:cNvSpPr/>
-          <p:nvPr/>
-        </p:nvSpPr>
-        <p:spPr>
-          <a:xfrm>
-            <a:off x="868680" y="5577840"/>
-            <a:ext cx="3017520" cy="466344"/>
-          </a:xfrm>
-          <a:prstGeom prst="rect">
-            <a:avLst/>
-          </a:prstGeom>
-          <a:noFill/>
-          <a:ln/>
-        </p:spPr>
-        <p:txBody>
-          <a:bodyPr wrap="square" lIns="0" tIns="0" rIns="0" bIns="0" rtlCol="0" anchor="ctr"/>
-          <a:lstStyle/>
-          <a:p>
-            <a:pPr indent="0" marL="0">
-              <a:lnSpc>
-                <a:spcPts val="1600"/>
-              </a:lnSpc>
-              <a:buNone/>
-            </a:pPr>
-            <a:r>
-              <a:rPr lang="en-US" sz="1250" b="1" dirty="0">
-                <a:solidFill>
-                  <a:srgbClr val="11121A"/>
-                </a:solidFill>
-                <a:latin typeface="Palatino Linotype" pitchFamily="34" charset="0"/>
-                <a:ea typeface="Palatino Linotype" pitchFamily="34" charset="-122"/>
-                <a:cs typeface="Palatino Linotype" pitchFamily="34" charset="-120"/>
-              </a:rPr>
-              <a:t>Furnizarea serviciilor</a:t>
-            </a:r>
-            <a:endParaRPr lang="en-US" sz="1250" dirty="0"/>
-          </a:p>
-        </p:txBody>
-      </p:sp>
-      <p:sp>
-        <p:nvSpPr>
-          <p:cNvPr id="31" name="Text 29"/>
-          <p:cNvSpPr/>
-          <p:nvPr/>
-        </p:nvSpPr>
-        <p:spPr>
-          <a:xfrm>
-            <a:off x="3886200" y="5577840"/>
-            <a:ext cx="4389120" cy="466344"/>
-          </a:xfrm>
-          <a:prstGeom prst="rect">
-            <a:avLst/>
-          </a:prstGeom>
-          <a:noFill/>
-          <a:ln/>
-        </p:spPr>
-        <p:txBody>
-          <a:bodyPr wrap="square" lIns="0" tIns="0" rIns="0" bIns="0" rtlCol="0" anchor="ctr"/>
-          <a:lstStyle/>
-          <a:p>
-            <a:pPr indent="0" marL="0">
-              <a:lnSpc>
-                <a:spcPts val="1600"/>
-              </a:lnSpc>
-              <a:buNone/>
-            </a:pPr>
-            <a:r>
-              <a:rPr lang="en-US" sz="1250" dirty="0">
-                <a:solidFill>
-                  <a:srgbClr val="11121A"/>
-                </a:solidFill>
-                <a:latin typeface="Palatino Linotype" pitchFamily="34" charset="0"/>
-                <a:ea typeface="Palatino Linotype" pitchFamily="34" charset="-122"/>
-                <a:cs typeface="Palatino Linotype" pitchFamily="34" charset="-120"/>
-              </a:rPr>
-              <a:t>Absenteism; trimiteri inutile; plăți informale cerute</a:t>
-            </a:r>
-            <a:endParaRPr lang="en-US" sz="1250" dirty="0"/>
-          </a:p>
-        </p:txBody>
-      </p:sp>
-      <p:sp>
-        <p:nvSpPr>
-          <p:cNvPr id="32" name="Text 30"/>
-          <p:cNvSpPr/>
-          <p:nvPr/>
-        </p:nvSpPr>
-        <p:spPr>
-          <a:xfrm>
-            <a:off x="8458200" y="5577840"/>
-            <a:ext cx="2926080" cy="466344"/>
-          </a:xfrm>
-          <a:prstGeom prst="rect">
-            <a:avLst/>
-          </a:prstGeom>
-          <a:noFill/>
-          <a:ln/>
-        </p:spPr>
-        <p:txBody>
-          <a:bodyPr wrap="square" lIns="0" tIns="0" rIns="0" bIns="0" rtlCol="0" anchor="ctr"/>
-          <a:lstStyle/>
-          <a:p>
-            <a:pPr indent="0" marL="0">
-              <a:lnSpc>
-                <a:spcPts val="1600"/>
-              </a:lnSpc>
-              <a:buNone/>
-            </a:pPr>
-            <a:r>
-              <a:rPr lang="en-US" sz="1250" dirty="0">
-                <a:solidFill>
-                  <a:srgbClr val="11121A"/>
-                </a:solidFill>
-                <a:latin typeface="Palatino Linotype" pitchFamily="34" charset="0"/>
-                <a:ea typeface="Palatino Linotype" pitchFamily="34" charset="-122"/>
-                <a:cs typeface="Palatino Linotype" pitchFamily="34" charset="-120"/>
-              </a:rPr>
-              <a:t>1, 6</a:t>
+              <a:t>—</a:t>
             </a:r>
             <a:endParaRPr lang="en-US" sz="1250" dirty="0"/>
           </a:p>
@@ -10125,7 +9791,7 @@
                 <a:ea typeface="Palatino Linotype" pitchFamily="34" charset="-122"/>
                 <a:cs typeface="Palatino Linotype" pitchFamily="34" charset="-120"/>
               </a:rPr>
-              <a:t>Vian T., Health Policy and Planning, 2008, tabelul 1, doi:10.1093/heapol/czm048 [TI, recitit în septembrie 2026]. Tabelul este atribuit de autoare unui capitol propriu anterior, din 2005.</a:t>
+              <a:t>Tipologia Uniunii Europene a corupției în sectorul sanitar (2013, actualizată în 2017), după rezumatul din Vian, Global Health Action, 2020, tabelul 3 [TI]. Traducerea și prescurtarea ne aparțin.</a:t>
             </a:r>
             <a:endParaRPr lang="en-US" sz="950" dirty="0"/>
           </a:p>
@@ -10266,7 +9932,7 @@
                 <a:ea typeface="Palatino Linotype" pitchFamily="34" charset="-122"/>
                 <a:cs typeface="Palatino Linotype" pitchFamily="34" charset="-120"/>
               </a:rPr>
-              <a:t>Cele șapte procese nu se însumează</a:t>
+              <a:t>Cele șase categorii nu se însumează</a:t>
             </a:r>
             <a:endParaRPr lang="en-US" sz="3300" dirty="0"/>
           </a:p>
@@ -10339,7 +10005,7 @@
                 <a:ea typeface="Palatino Linotype" pitchFamily="34" charset="-122"/>
                 <a:cs typeface="Palatino Linotype" pitchFamily="34" charset="-120"/>
               </a:rPr>
-              <a:t>Un instrument care măsoară plățile informale din ultimul rând nu spune nimic despre ce se întâmplă în al doilea. Două procese cu mecanisme diferite, actori diferiți și consecințe diferite pentru pacient nu produc o cantitate comună.</a:t>
+              <a:t>Un instrument care măsoară plățile informale de pe primul rând nu spune nimic despre ce se întâmplă pe al doilea. Două categorii cu mecanisme diferite, actori diferiți și consecințe diferite pentru pacient nu produc o cantitate comună.</a:t>
             </a:r>
             <a:endParaRPr lang="en-US" sz="1600" dirty="0"/>
           </a:p>
@@ -11657,7 +11323,27 @@
                 <a:ea typeface="Palatino Linotype" pitchFamily="34" charset="-122"/>
                 <a:cs typeface="Palatino Linotype" pitchFamily="34" charset="-120"/>
               </a:rPr>
-              <a:t>Financiară sau venită dinspre pacient: un salariu care nu acoperă nevoile, o familie care așteaptă, un pacient care insistă să dea.</a:t>
+              <a:t>Financiară sau structurală, de exemplu salarii mici (Vian, 2020).</a:t>
+            </a:r>
+            <a:endParaRPr lang="en-US" sz="1350" dirty="0"/>
+          </a:p>
+          <a:p>
+            <a:pPr algn="l" indent="0" marL="0">
+              <a:lnSpc>
+                <a:spcPts val="1800"/>
+              </a:lnSpc>
+              <a:buNone/>
+            </a:pPr>
+            <a:r>
+              <a:rPr lang="en-US" sz="1350" dirty="0">
+                <a:solidFill>
+                  <a:srgbClr val="11121A"/>
+                </a:solidFill>
+                <a:latin typeface="Palatino Linotype" pitchFamily="34" charset="0"/>
+                <a:ea typeface="Palatino Linotype" pitchFamily="34" charset="-122"/>
+                <a:cs typeface="Palatino Linotype" pitchFamily="34" charset="-120"/>
+              </a:rPr>
+              <a:t>De exemplu, într-un spital: o familie care așteaptă, un pacient care insistă să dea.</a:t>
             </a:r>
             <a:endParaRPr lang="en-US" sz="1350" dirty="0"/>
           </a:p>
@@ -11840,7 +11526,27 @@
                 <a:ea typeface="Palatino Linotype" pitchFamily="34" charset="-122"/>
                 <a:cs typeface="Palatino Linotype" pitchFamily="34" charset="-120"/>
               </a:rPr>
-              <a:t>Atitudinile și normele din jur susțin decizia: „toată lumea face așa”, „nu am cerut, mi s-a dat”, „este un semn de recunoștință”.</a:t>
+              <a:t>Felul în care cineva își justifică propriul comportament.</a:t>
+            </a:r>
+            <a:endParaRPr lang="en-US" sz="1350" dirty="0"/>
+          </a:p>
+          <a:p>
+            <a:pPr algn="l" indent="0" marL="0">
+              <a:lnSpc>
+                <a:spcPts val="1800"/>
+              </a:lnSpc>
+              <a:buNone/>
+            </a:pPr>
+            <a:r>
+              <a:rPr lang="en-US" sz="1350" dirty="0">
+                <a:solidFill>
+                  <a:srgbClr val="11121A"/>
+                </a:solidFill>
+                <a:latin typeface="Palatino Linotype" pitchFamily="34" charset="0"/>
+                <a:ea typeface="Palatino Linotype" pitchFamily="34" charset="-122"/>
+                <a:cs typeface="Palatino Linotype" pitchFamily="34" charset="-120"/>
+              </a:rPr>
+              <a:t>De exemplu: „toată lumea face așa”, „nu am cerut, mi s-a dat”, „este un semn de recunoștință”.</a:t>
             </a:r>
             <a:endParaRPr lang="en-US" sz="1350" dirty="0"/>
           </a:p>
@@ -12023,7 +11729,7 @@
                 <a:ea typeface="Palatino Linotype" pitchFamily="34" charset="-122"/>
                 <a:cs typeface="Palatino Linotype" pitchFamily="34" charset="-120"/>
               </a:rPr>
-              <a:t>Posibilitatea de a o face fără consecințe. Din ce este făcută: pe diapozitivul următor.</a:t>
+              <a:t>Golurile din control care permit abuzul de putere, de exemplu discreția prea mare. Din ce este făcută: pe diapozitivul următor.</a:t>
             </a:r>
             <a:endParaRPr lang="en-US" sz="1350" dirty="0"/>
           </a:p>
@@ -12062,7 +11768,7 @@
                 <a:ea typeface="Palatino Linotype" pitchFamily="34" charset="-122"/>
                 <a:cs typeface="Palatino Linotype" pitchFamily="34" charset="-120"/>
               </a:rPr>
-              <a:t>Vian T., Health Policy and Planning, 2008, figura 2, doi:10.1093/heapol/czm048 [TI, recitit în septembrie 2026]. Cele trei forțe acționează împreună: o intervenție care reduce numai una lucrează asupra unei singure forțe din trei.</a:t>
+              <a:t>Cadrul lui Vian (2008), după Vian, Global Health Action, 2020 [TI]: trei cauze apropiate. O intervenție care reduce numai presiunea lucrează asupra uneia singure dintre cele trei cauze.</a:t>
             </a:r>
             <a:endParaRPr lang="en-US" sz="950" dirty="0"/>
           </a:p>
@@ -12211,7 +11917,7 @@
                 <a:ea typeface="Palatino Linotype" pitchFamily="34" charset="-122"/>
                 <a:cs typeface="Palatino Linotype" pitchFamily="34" charset="-120"/>
               </a:rPr>
-              <a:t>Formularea clasică a lui Klitgaard, preluată de Vian pentru sectorul sanitar.</a:t>
+              <a:t>Modelul lui Klitgaard, preluat în cadrul lui Vian (2008; Vian, 2020).</a:t>
             </a:r>
             <a:endParaRPr lang="en-US" sz="1450" dirty="0"/>
           </a:p>
@@ -12394,7 +12100,7 @@
                 <a:ea typeface="Palatino Linotype" pitchFamily="34" charset="-122"/>
                 <a:cs typeface="Palatino Linotype" pitchFamily="34" charset="-120"/>
               </a:rPr>
-              <a:t>Lipsa unei alternative pentru pacient. Dacă statul este singurul furnizor, pacientul poate fi constrâns să plătească pentru a accesa serviciul.</a:t>
+              <a:t>Lipsa unei alternative pentru pacient. De exemplu, pacientul pentru care spitalul public este singura opțiune.</a:t>
             </a:r>
             <a:endParaRPr lang="en-US" sz="1300" dirty="0"/>
           </a:p>
@@ -12577,7 +12283,7 @@
                 <a:ea typeface="Palatino Linotype" pitchFamily="34" charset="-122"/>
                 <a:cs typeface="Palatino Linotype" pitchFamily="34" charset="-120"/>
               </a:rPr>
-              <a:t>Autonomia de decizie a celui care oferă serviciul, fără control adecvat: cine intră pe listă, cine primește patul, cine este programat mâine.</a:t>
+              <a:t>Putere de decizie prea mare, fără control asupra ei. De exemplu: cine intră pe listă, cine primește patul, cine este programat mâine.</a:t>
             </a:r>
             <a:endParaRPr lang="en-US" sz="1300" dirty="0"/>
           </a:p>
@@ -12760,7 +12466,7 @@
                 <a:ea typeface="Palatino Linotype" pitchFamily="34" charset="-122"/>
                 <a:cs typeface="Palatino Linotype" pitchFamily="34" charset="-120"/>
               </a:rPr>
-              <a:t>Cineva anume răspunde pentru decizie și pentru rezultat. O atribuție împărțită între mulți riscă să nu mai fie exercitată de nimeni.</a:t>
+              <a:t>Cineva anume răspunde pentru decizie și pentru rezultat. De exemplu, o atribuție împărțită între mulți riscă să nu mai fie exercitată de nimeni.</a:t>
             </a:r>
             <a:endParaRPr lang="en-US" sz="1300" dirty="0"/>
           </a:p>
@@ -12872,7 +12578,7 @@
                 <a:ea typeface="Palatino Linotype" pitchFamily="34" charset="-122"/>
                 <a:cs typeface="Palatino Linotype" pitchFamily="34" charset="-120"/>
               </a:rPr>
-              <a:t>Vian T., Health Policy and Planning, 2008, doi:10.1093/heapol/czm048 [TI, recitit în septembrie 2026], după Klitgaard. Unul dintre puținele teste directe în sănătate: în Bolivia, existența unor alternative la serviciile publice a fost asociată cu plăți informale mai mici (Gray-Molina et al., 2001).</a:t>
+              <a:t>Cadrul lui Vian (2008), după Vian, Global Health Action, 2020 [TI], care preia modelul lui Klitgaard. Exemplele din casete sunt ale noastre, din viața unui spital.</a:t>
             </a:r>
             <a:endParaRPr lang="en-US" sz="950" dirty="0"/>
           </a:p>
@@ -13666,7 +13372,7 @@
                 <a:ea typeface="Palatino Linotype" pitchFamily="34" charset="-122"/>
                 <a:cs typeface="Palatino Linotype" pitchFamily="34" charset="-120"/>
               </a:rPr>
-              <a:t>3, 7</a:t>
+              <a:t>3 · 7</a:t>
             </a:r>
             <a:endParaRPr lang="en-US" sz="1250" dirty="0"/>
           </a:p>
@@ -13792,7 +13498,7 @@
                 <a:ea typeface="Palatino Linotype" pitchFamily="34" charset="-122"/>
                 <a:cs typeface="Palatino Linotype" pitchFamily="34" charset="-120"/>
               </a:rPr>
-              <a:t>2, 7</a:t>
+              <a:t>2 · 7</a:t>
             </a:r>
             <a:endParaRPr lang="en-US" sz="1250" dirty="0"/>
           </a:p>
@@ -14075,7 +13781,7 @@
                 <a:ea typeface="Palatino Linotype" pitchFamily="34" charset="-122"/>
                 <a:cs typeface="Palatino Linotype" pitchFamily="34" charset="-120"/>
               </a:rPr>
-              <a:t>1, 4</a:t>
+              <a:t>1 · 4</a:t>
             </a:r>
             <a:endParaRPr lang="en-US" sz="1250" dirty="0"/>
           </a:p>
@@ -14232,7 +13938,7 @@
                 <a:ea typeface="Palatino Linotype" pitchFamily="34" charset="-122"/>
                 <a:cs typeface="Palatino Linotype" pitchFamily="34" charset="-120"/>
               </a:rPr>
-              <a:t>3, 7</a:t>
+              <a:t>3 · 7</a:t>
             </a:r>
             <a:endParaRPr lang="en-US" sz="1250" dirty="0"/>
           </a:p>
@@ -14316,7 +14022,7 @@
                 <a:ea typeface="Palatino Linotype" pitchFamily="34" charset="-122"/>
                 <a:cs typeface="Palatino Linotype" pitchFamily="34" charset="-120"/>
               </a:rPr>
-              <a:t>Averi, interese, incompatibilități; canal extern (Legea nr. 361/2022)</a:t>
+              <a:t>Averi, interese, incompatibilități; una dintre autoritățile care primesc raportările avertizorilor (Legea nr. 361/2022)</a:t>
             </a:r>
             <a:endParaRPr lang="en-US" sz="1250" dirty="0"/>
           </a:p>
@@ -14358,7 +14064,7 @@
                 <a:ea typeface="Palatino Linotype" pitchFamily="34" charset="-122"/>
                 <a:cs typeface="Palatino Linotype" pitchFamily="34" charset="-120"/>
               </a:rPr>
-              <a:t>3, 4, 5, 7</a:t>
+              <a:t>3 · 4 · 5 · 7</a:t>
             </a:r>
             <a:endParaRPr lang="en-US" sz="1250" dirty="0"/>
           </a:p>
@@ -14515,7 +14221,7 @@
                 <a:ea typeface="Palatino Linotype" pitchFamily="34" charset="-122"/>
                 <a:cs typeface="Palatino Linotype" pitchFamily="34" charset="-120"/>
               </a:rPr>
-              <a:t>2, 4, 7</a:t>
+              <a:t>2 · 4 · 7</a:t>
             </a:r>
             <a:endParaRPr lang="en-US" sz="1250" dirty="0"/>
           </a:p>
@@ -14554,7 +14260,7 @@
                 <a:ea typeface="Palatino Linotype" pitchFamily="34" charset="-122"/>
                 <a:cs typeface="Palatino Linotype" pitchFamily="34" charset="-120"/>
               </a:rPr>
-              <a:t>Lista completă, inclusiv Consiliul Concurenței, este în notele de curs, secțiunea 1.8.</a:t>
+              <a:t>ANMDMR: Agenția Națională a Medicamentului și a Dispozitivelor Medicale din România. Lista completă, inclusiv Consiliul Concurenței, este în notele de curs, la „Harta instituțională”.</a:t>
             </a:r>
             <a:endParaRPr lang="en-US" sz="950" dirty="0"/>
           </a:p>
@@ -14810,7 +14516,7 @@
                 <a:ea typeface="Palatino Linotype" pitchFamily="34" charset="-122"/>
                 <a:cs typeface="Palatino Linotype" pitchFamily="34" charset="-120"/>
               </a:rPr>
-              <a:t>Evaluează declarațiile de avere și de interese, modificările patrimoniale, incompatibilitățile și conflictele de interese. Este canal extern de raportare pentru avertizori, potrivit Legii nr. 361/2022.</a:t>
+              <a:t>Evaluează declarațiile de avere și de interese, modificările patrimoniale, incompatibilitățile și conflictele de interese. Este una dintre autoritățile competente să primească raportările avertizorilor (Legea nr. 361/2022) și le transmite, după caz, autorităților competente să le soluționeze.</a:t>
             </a:r>
             <a:endParaRPr lang="en-US" sz="1400" dirty="0"/>
           </a:p>
@@ -15040,7 +14746,7 @@
                 <a:ea typeface="Palatino Linotype" pitchFamily="34" charset="-122"/>
                 <a:cs typeface="Palatino Linotype" pitchFamily="34" charset="-120"/>
               </a:rPr>
-              <a:t>O sesizare adresată instituției nepotrivite nu produce consecința urmărită și consumă timp. Alegerea instituției se exersează în ultima ședință, printr-o simulare de raportare.</a:t>
+              <a:t>Alegerea instituției căreia i se adresează o sesizare se exersează în ultima ședință, printr-o simulare de raportare.</a:t>
             </a:r>
             <a:endParaRPr lang="en-US" sz="1500" dirty="0"/>
           </a:p>
@@ -15111,7 +14817,7 @@
                 <a:ea typeface="Palatino Linotype" pitchFamily="34" charset="-122"/>
                 <a:cs typeface="Palatino Linotype" pitchFamily="34" charset="-120"/>
               </a:rPr>
-              <a:t>03</a:t>
+              <a:t>3</a:t>
             </a:r>
             <a:endParaRPr lang="en-US" sz="13500" dirty="0"/>
           </a:p>
@@ -21947,7 +21653,7 @@
                 <a:ea typeface="Palatino Linotype" pitchFamily="34" charset="-122"/>
                 <a:cs typeface="Palatino Linotype" pitchFamily="34" charset="-120"/>
               </a:rPr>
-              <a:t>Rețineți structura: numitorul întrebării 2 NU este populația generală, ci subgrupul care a trecut de filtrul 1. Aici se află capcanele din diapozitivele următoare.</a:t>
+              <a:t>Rețineți structura: numitorul întrebării de experiență NU este populația generală, ci subgrupul care a trecut de filtru. Aici se află capcanele din diapozitivele următoare.</a:t>
             </a:r>
             <a:endParaRPr lang="en-US" sz="1450" dirty="0"/>
           </a:p>
@@ -24184,7 +23890,7 @@
                 <a:ea typeface="Palatino Linotype" pitchFamily="34" charset="-122"/>
                 <a:cs typeface="Palatino Linotype" pitchFamily="34" charset="-120"/>
               </a:rPr>
-              <a:t>Raportul este de aproape șase la unu. Media UE-27 la itemul de percepție: 29%. În 2023, sănătatea a fost domeniul cel mai des indicat în România.</a:t>
+              <a:t>Media UE-27 la itemul de percepție: 29%. În 2023, sănătatea a fost domeniul cel mai des indicat în România.</a:t>
             </a:r>
             <a:endParaRPr lang="en-US" sz="1400" dirty="0"/>
           </a:p>
@@ -26225,7 +25931,7 @@
                 <a:ea typeface="Palatino Linotype" pitchFamily="34" charset="-122"/>
                 <a:cs typeface="Palatino Linotype" pitchFamily="34" charset="-120"/>
               </a:rPr>
-              <a:t>Părțile 1a și 1b</a:t>
+              <a:t>Trei martori, apoi sinteza</a:t>
             </a:r>
             <a:endParaRPr lang="en-US" sz="1400" dirty="0"/>
           </a:p>
@@ -26309,7 +26015,7 @@
                 <a:ea typeface="Palatino Linotype" pitchFamily="34" charset="-122"/>
                 <a:cs typeface="Palatino Linotype" pitchFamily="34" charset="-120"/>
               </a:rPr>
-              <a:t>Noțiunea 2, „11% sau 16%?” și Capcana 1</a:t>
+              <a:t>Numitorul, „11% sau 16%?” și cazul de început</a:t>
             </a:r>
             <a:endParaRPr lang="en-US" sz="1400" dirty="0"/>
           </a:p>
@@ -26424,7 +26130,7 @@
                 <a:ea typeface="Palatino Linotype" pitchFamily="34" charset="-122"/>
                 <a:cs typeface="Palatino Linotype" pitchFamily="34" charset="-120"/>
               </a:rPr>
-              <a:t>Capcana 1, la persoana întâi</a:t>
+              <a:t>Cazul de început, la persoana întâi</a:t>
             </a:r>
             <a:endParaRPr lang="en-US" sz="1400" dirty="0"/>
           </a:p>
@@ -27233,7 +26939,7 @@
                 <a:ea typeface="Palatino Linotype" pitchFamily="34" charset="-122"/>
                 <a:cs typeface="Palatino Linotype" pitchFamily="34" charset="-120"/>
               </a:rPr>
-              <a:t>04</a:t>
+              <a:t>4</a:t>
             </a:r>
             <a:endParaRPr lang="en-US" sz="13500" dirty="0"/>
           </a:p>
@@ -30951,7 +30657,7 @@
                 <a:ea typeface="Palatino Linotype" pitchFamily="34" charset="-122"/>
                 <a:cs typeface="Palatino Linotype" pitchFamily="34" charset="-120"/>
               </a:rPr>
-              <a:t>05</a:t>
+              <a:t>5</a:t>
             </a:r>
             <a:endParaRPr lang="en-US" sz="13500" dirty="0"/>
           </a:p>
@@ -31019,7 +30725,7 @@
                 <a:ea typeface="Palatino Linotype" pitchFamily="34" charset="-122"/>
                 <a:cs typeface="Palatino Linotype" pitchFamily="34" charset="-120"/>
               </a:rPr>
-              <a:t>CONTRACTUL</a:t>
+              <a:t>EVALUAREA</a:t>
             </a:r>
             <a:endParaRPr lang="en-US" sz="3300" dirty="0"/>
           </a:p>
@@ -31061,7 +30767,7 @@
                 <a:ea typeface="Palatino Linotype" pitchFamily="34" charset="-122"/>
                 <a:cs typeface="Palatino Linotype" pitchFamily="34" charset="-120"/>
               </a:rPr>
-              <a:t>Această ședință nu este evaluată, dar stabilește regulile după care se evaluează celelalte. Se enunță acum, o singură dată, ca să nu existe surprize în ședința a patra.</a:t>
+              <a:t>Cele două componente ale notei și ce nu se notează, enunțate acum, o singură dată. Cazul de astăzi pregătește direct analiza de știre.</a:t>
             </a:r>
             <a:endParaRPr lang="en-US" sz="1500" dirty="0"/>
           </a:p>
@@ -31171,7 +30877,7 @@
                 <a:ea typeface="Palatino Linotype" pitchFamily="34" charset="-122"/>
                 <a:cs typeface="Palatino Linotype" pitchFamily="34" charset="-120"/>
               </a:rPr>
-              <a:t>Trei componente, trei praguri</a:t>
+              <a:t>Două componente de notă</a:t>
             </a:r>
             <a:endParaRPr lang="en-US" sz="3100" dirty="0"/>
           </a:p>
@@ -31361,7 +31067,7 @@
                 <a:ea typeface="Palatino Linotype" pitchFamily="34" charset="-122"/>
                 <a:cs typeface="Palatino Linotype" pitchFamily="34" charset="-120"/>
               </a:rPr>
-              <a:t>Investigație documentară individuală</a:t>
+              <a:t>Analiza unei știri reale despre corupție în sănătate, pe o pagină</a:t>
             </a:r>
             <a:endParaRPr lang="en-US" sz="1400" dirty="0"/>
           </a:p>
@@ -31403,7 +31109,7 @@
                 <a:ea typeface="Palatino Linotype" pitchFamily="34" charset="-122"/>
                 <a:cs typeface="Palatino Linotype" pitchFamily="34" charset="-120"/>
               </a:rPr>
-              <a:t>40%</a:t>
+              <a:t>60%</a:t>
             </a:r>
             <a:endParaRPr lang="en-US" sz="1400" dirty="0"/>
           </a:p>
@@ -31445,7 +31151,7 @@
                 <a:ea typeface="Palatino Linotype" pitchFamily="34" charset="-122"/>
                 <a:cs typeface="Palatino Linotype" pitchFamily="34" charset="-120"/>
               </a:rPr>
-              <a:t>predare electronică în ședința a șaptea</a:t>
+              <a:t>predare în ședința a șasea</a:t>
             </a:r>
             <a:endParaRPr lang="en-US" sz="1400" dirty="0"/>
           </a:p>
@@ -31487,7 +31193,7 @@
                 <a:ea typeface="Palatino Linotype" pitchFamily="34" charset="-122"/>
                 <a:cs typeface="Palatino Linotype" pitchFamily="34" charset="-120"/>
               </a:rPr>
-              <a:t>Trei dezbateri Oxford evaluate</a:t>
+              <a:t>Chestionar de 15 grile, numai din cazurile discutate în sală</a:t>
             </a:r>
             <a:endParaRPr lang="en-US" sz="1400" dirty="0"/>
           </a:p>
@@ -31529,7 +31235,7 @@
                 <a:ea typeface="Palatino Linotype" pitchFamily="34" charset="-122"/>
                 <a:cs typeface="Palatino Linotype" pitchFamily="34" charset="-120"/>
               </a:rPr>
-              <a:t>30%</a:t>
+              <a:t>40%</a:t>
             </a:r>
             <a:endParaRPr lang="en-US" sz="1400" dirty="0"/>
           </a:p>
@@ -31571,7 +31277,7 @@
                 <a:ea typeface="Palatino Linotype" pitchFamily="34" charset="-122"/>
                 <a:cs typeface="Palatino Linotype" pitchFamily="34" charset="-120"/>
               </a:rPr>
-              <a:t>Ședințele 4, 6 și 7</a:t>
+              <a:t>ultima ședință, 20 de minute</a:t>
             </a:r>
             <a:endParaRPr lang="en-US" sz="1400" dirty="0"/>
           </a:p>
@@ -31644,7 +31350,7 @@
                 <a:ea typeface="Palatino Linotype" pitchFamily="34" charset="-122"/>
                 <a:cs typeface="Palatino Linotype" pitchFamily="34" charset="-120"/>
               </a:rPr>
-              <a:t>Chestionar final (20 de itemi grilă și 2 cu răspuns scurt)</a:t>
+              <a:t>Votul pe telefon, discuțiile și dezbaterile din sală</a:t>
             </a:r>
             <a:endParaRPr lang="en-US" sz="1400" dirty="0"/>
           </a:p>
@@ -31686,7 +31392,7 @@
                 <a:ea typeface="Palatino Linotype" pitchFamily="34" charset="-122"/>
                 <a:cs typeface="Palatino Linotype" pitchFamily="34" charset="-120"/>
               </a:rPr>
-              <a:t>30%</a:t>
+              <a:t>fără notă</a:t>
             </a:r>
             <a:endParaRPr lang="en-US" sz="1400" dirty="0"/>
           </a:p>
@@ -31728,7 +31434,7 @@
                 <a:ea typeface="Palatino Linotype" pitchFamily="34" charset="-122"/>
                 <a:cs typeface="Palatino Linotype" pitchFamily="34" charset="-120"/>
               </a:rPr>
-              <a:t>Ședința 7</a:t>
+              <a:t>în sală</a:t>
             </a:r>
             <a:endParaRPr lang="en-US" sz="1400" dirty="0"/>
           </a:p>
@@ -31801,7 +31507,7 @@
                 <a:ea typeface="Palatino Linotype" pitchFamily="34" charset="-122"/>
                 <a:cs typeface="Palatino Linotype" pitchFamily="34" charset="-120"/>
               </a:rPr>
-              <a:t>NF = 0,40 × nota investigației + 0,30 × media celor trei dezbateri + 0,30 × nota chestionarului</a:t>
+              <a:t>Promovare: nota finală de cel puțin cinci și cel puțin cinci la fiecare componentă.</a:t>
             </a:r>
             <a:endParaRPr lang="en-US" sz="1600" dirty="0"/>
           </a:p>
@@ -31843,7 +31549,7 @@
                 <a:ea typeface="Palatino Linotype" pitchFamily="34" charset="-122"/>
                 <a:cs typeface="Palatino Linotype" pitchFamily="34" charset="-120"/>
               </a:rPr>
-              <a:t>Minimum 5,00 la FIECARE componentă, nu doar la nota finală. Contestații: 48 de ore de la comunicare, în scris, cu indicarea criteriului contestat; același termen pentru toate cele trei componente.</a:t>
+              <a:t>Prezența la cel puțin cinci din cele șapte ședințe. Contestațiile se depun în scris, în 48 de ore de la comunicarea notei.</a:t>
             </a:r>
             <a:endParaRPr lang="en-US" sz="1350" dirty="0"/>
           </a:p>
@@ -31882,7 +31588,7 @@
                 <a:ea typeface="Palatino Linotype" pitchFamily="34" charset="-122"/>
                 <a:cs typeface="Palatino Linotype" pitchFamily="34" charset="-120"/>
               </a:rPr>
-              <a:t>Contractul complet: fișa disciplinei, secțiunea 10; notele de curs, contractul de evaluare; fișa de resurse, punctul 5.</a:t>
+              <a:t>Regulile sunt cele din notele de curs („Cum sunteți evaluați”) și de pe pagina disciplinei.</a:t>
             </a:r>
             <a:endParaRPr lang="en-US" sz="950" dirty="0"/>
           </a:p>
@@ -32611,1347 +32317,6 @@
 
 <file path=ppt/slides/slide50.xml><?xml version="1.0" encoding="utf-8"?>
 <p:sld xmlns:a="http://schemas.openxmlformats.org/drawingml/2006/main" xmlns:r="http://schemas.openxmlformats.org/officeDocument/2006/relationships" xmlns:p="http://schemas.openxmlformats.org/presentationml/2006/main">
-  <p:cSld name="Slide 48">
-    <p:bg>
-      <p:bgPr>
-        <a:solidFill>
-          <a:srgbClr val="11121A"/>
-        </a:solidFill>
-      </p:bgPr>
-    </p:bg>
-    <p:spTree>
-      <p:nvGrpSpPr>
-        <p:cNvPr id="1" name=""/>
-        <p:cNvGrpSpPr/>
-        <p:nvPr/>
-      </p:nvGrpSpPr>
-      <p:grpSpPr>
-        <a:xfrm>
-          <a:off x="0" y="0"/>
-          <a:ext cx="0" cy="0"/>
-          <a:chOff x="0" y="0"/>
-          <a:chExt cx="0" cy="0"/>
-        </a:xfrm>
-      </p:grpSpPr>
-      <p:sp>
-        <p:nvSpPr>
-          <p:cNvPr id="2" name="Text 0"/>
-          <p:cNvSpPr/>
-          <p:nvPr/>
-        </p:nvSpPr>
-        <p:spPr>
-          <a:xfrm>
-            <a:off x="594360" y="384048"/>
-            <a:ext cx="10058400" cy="274320"/>
-          </a:xfrm>
-          <a:prstGeom prst="rect">
-            <a:avLst/>
-          </a:prstGeom>
-          <a:noFill/>
-          <a:ln/>
-        </p:spPr>
-        <p:txBody>
-          <a:bodyPr wrap="square" lIns="0" tIns="0" rIns="0" bIns="0" rtlCol="0" anchor="ctr"/>
-          <a:lstStyle/>
-          <a:p>
-            <a:pPr indent="0" marL="0">
-              <a:buNone/>
-            </a:pPr>
-            <a:r>
-              <a:rPr lang="en-US" sz="1100" b="1" spc="300" kern="0" dirty="0">
-                <a:solidFill>
-                  <a:srgbClr val="27D3BE"/>
-                </a:solidFill>
-                <a:latin typeface="Palatino Linotype" pitchFamily="34" charset="0"/>
-                <a:ea typeface="Palatino Linotype" pitchFamily="34" charset="-122"/>
-                <a:cs typeface="Palatino Linotype" pitchFamily="34" charset="-120"/>
-              </a:rPr>
-              <a:t>IDENTICĂ ÎN ȘEDINȚELE 4, 6 ȘI 7</a:t>
-            </a:r>
-            <a:endParaRPr lang="en-US" sz="1100" dirty="0"/>
-          </a:p>
-        </p:txBody>
-      </p:sp>
-      <p:sp>
-        <p:nvSpPr>
-          <p:cNvPr id="3" name="Text 1"/>
-          <p:cNvSpPr/>
-          <p:nvPr/>
-        </p:nvSpPr>
-        <p:spPr>
-          <a:xfrm>
-            <a:off x="594360" y="694944"/>
-            <a:ext cx="10972800" cy="658368"/>
-          </a:xfrm>
-          <a:prstGeom prst="rect">
-            <a:avLst/>
-          </a:prstGeom>
-          <a:noFill/>
-          <a:ln/>
-        </p:spPr>
-        <p:txBody>
-          <a:bodyPr wrap="square" lIns="0" tIns="0" rIns="0" bIns="0" rtlCol="0" anchor="ctr"/>
-          <a:lstStyle/>
-          <a:p>
-            <a:pPr indent="0" marL="0">
-              <a:buNone/>
-            </a:pPr>
-            <a:r>
-              <a:rPr lang="en-US" sz="3200" b="1" dirty="0">
-                <a:solidFill>
-                  <a:srgbClr val="FFFFFF"/>
-                </a:solidFill>
-                <a:latin typeface="Palatino Linotype" pitchFamily="34" charset="0"/>
-                <a:ea typeface="Palatino Linotype" pitchFamily="34" charset="-122"/>
-                <a:cs typeface="Palatino Linotype" pitchFamily="34" charset="-120"/>
-              </a:rPr>
-              <a:t>Grila dezbaterilor</a:t>
-            </a:r>
-            <a:endParaRPr lang="en-US" sz="3200" dirty="0"/>
-          </a:p>
-        </p:txBody>
-      </p:sp>
-      <p:sp>
-        <p:nvSpPr>
-          <p:cNvPr id="4" name="Text 2"/>
-          <p:cNvSpPr/>
-          <p:nvPr/>
-        </p:nvSpPr>
-        <p:spPr>
-          <a:xfrm>
-            <a:off x="594360" y="2011680"/>
-            <a:ext cx="2926080" cy="329184"/>
-          </a:xfrm>
-          <a:prstGeom prst="rect">
-            <a:avLst/>
-          </a:prstGeom>
-          <a:noFill/>
-          <a:ln/>
-        </p:spPr>
-        <p:txBody>
-          <a:bodyPr wrap="square" lIns="0" tIns="0" rIns="0" bIns="0" rtlCol="0" anchor="ctr"/>
-          <a:lstStyle/>
-          <a:p>
-            <a:pPr indent="0" marL="0">
-              <a:buNone/>
-            </a:pPr>
-            <a:r>
-              <a:rPr lang="en-US" sz="1050" b="1" spc="120" kern="0" dirty="0">
-                <a:solidFill>
-                  <a:srgbClr val="959BB0"/>
-                </a:solidFill>
-                <a:latin typeface="Palatino Linotype" pitchFamily="34" charset="0"/>
-                <a:ea typeface="Palatino Linotype" pitchFamily="34" charset="-122"/>
-                <a:cs typeface="Palatino Linotype" pitchFamily="34" charset="-120"/>
-              </a:rPr>
-              <a:t>CRITERIU</a:t>
-            </a:r>
-            <a:endParaRPr lang="en-US" sz="1050" dirty="0"/>
-          </a:p>
-        </p:txBody>
-      </p:sp>
-      <p:sp>
-        <p:nvSpPr>
-          <p:cNvPr id="5" name="Text 3"/>
-          <p:cNvSpPr/>
-          <p:nvPr/>
-        </p:nvSpPr>
-        <p:spPr>
-          <a:xfrm>
-            <a:off x="3520440" y="2011680"/>
-            <a:ext cx="6035040" cy="329184"/>
-          </a:xfrm>
-          <a:prstGeom prst="rect">
-            <a:avLst/>
-          </a:prstGeom>
-          <a:noFill/>
-          <a:ln/>
-        </p:spPr>
-        <p:txBody>
-          <a:bodyPr wrap="square" lIns="0" tIns="0" rIns="0" bIns="0" rtlCol="0" anchor="ctr"/>
-          <a:lstStyle/>
-          <a:p>
-            <a:pPr indent="0" marL="0">
-              <a:buNone/>
-            </a:pPr>
-            <a:r>
-              <a:rPr lang="en-US" sz="1050" b="1" spc="120" kern="0" dirty="0">
-                <a:solidFill>
-                  <a:srgbClr val="959BB0"/>
-                </a:solidFill>
-                <a:latin typeface="Palatino Linotype" pitchFamily="34" charset="0"/>
-                <a:ea typeface="Palatino Linotype" pitchFamily="34" charset="-122"/>
-                <a:cs typeface="Palatino Linotype" pitchFamily="34" charset="-120"/>
-              </a:rPr>
-              <a:t>CE SE EVALUEAZĂ</a:t>
-            </a:r>
-            <a:endParaRPr lang="en-US" sz="1050" dirty="0"/>
-          </a:p>
-        </p:txBody>
-      </p:sp>
-      <p:sp>
-        <p:nvSpPr>
-          <p:cNvPr id="6" name="Text 4"/>
-          <p:cNvSpPr/>
-          <p:nvPr/>
-        </p:nvSpPr>
-        <p:spPr>
-          <a:xfrm>
-            <a:off x="9555480" y="2011680"/>
-            <a:ext cx="2011680" cy="329184"/>
-          </a:xfrm>
-          <a:prstGeom prst="rect">
-            <a:avLst/>
-          </a:prstGeom>
-          <a:noFill/>
-          <a:ln/>
-        </p:spPr>
-        <p:txBody>
-          <a:bodyPr wrap="square" lIns="0" tIns="0" rIns="0" bIns="0" rtlCol="0" anchor="ctr"/>
-          <a:lstStyle/>
-          <a:p>
-            <a:pPr indent="0" marL="0">
-              <a:buNone/>
-            </a:pPr>
-            <a:r>
-              <a:rPr lang="en-US" sz="1050" b="1" spc="120" kern="0" dirty="0">
-                <a:solidFill>
-                  <a:srgbClr val="959BB0"/>
-                </a:solidFill>
-                <a:latin typeface="Palatino Linotype" pitchFamily="34" charset="0"/>
-                <a:ea typeface="Palatino Linotype" pitchFamily="34" charset="-122"/>
-                <a:cs typeface="Palatino Linotype" pitchFamily="34" charset="-120"/>
-              </a:rPr>
-              <a:t>PUNCTAJ</a:t>
-            </a:r>
-            <a:endParaRPr lang="en-US" sz="1050" dirty="0"/>
-          </a:p>
-        </p:txBody>
-      </p:sp>
-      <p:sp>
-        <p:nvSpPr>
-          <p:cNvPr id="7" name="Shape 5"/>
-          <p:cNvSpPr/>
-          <p:nvPr/>
-        </p:nvSpPr>
-        <p:spPr>
-          <a:xfrm>
-            <a:off x="594360" y="2414016"/>
-            <a:ext cx="10972800" cy="612648"/>
-          </a:xfrm>
-          <a:prstGeom prst="roundRect">
-            <a:avLst>
-              <a:gd name="adj" fmla="val 13433"/>
-            </a:avLst>
-          </a:prstGeom>
-          <a:solidFill>
-            <a:srgbClr val="1D1F2B"/>
-          </a:solidFill>
-          <a:ln w="12700">
-            <a:solidFill>
-              <a:srgbClr val="1D1F2B"/>
-            </a:solidFill>
-            <a:prstDash val="solid"/>
-          </a:ln>
-        </p:spPr>
-        <p:txBody>
-          <a:bodyPr/>
-          <a:p/>
-        </p:txBody>
-      </p:sp>
-      <p:sp>
-        <p:nvSpPr>
-          <p:cNvPr id="8" name="Text 6"/>
-          <p:cNvSpPr/>
-          <p:nvPr/>
-        </p:nvSpPr>
-        <p:spPr>
-          <a:xfrm>
-            <a:off x="868680" y="2414016"/>
-            <a:ext cx="2651760" cy="612648"/>
-          </a:xfrm>
-          <a:prstGeom prst="rect">
-            <a:avLst/>
-          </a:prstGeom>
-          <a:noFill/>
-          <a:ln/>
-        </p:spPr>
-        <p:txBody>
-          <a:bodyPr wrap="square" lIns="0" tIns="0" rIns="0" bIns="0" rtlCol="0" anchor="ctr"/>
-          <a:lstStyle/>
-          <a:p>
-            <a:pPr indent="0" marL="0">
-              <a:lnSpc>
-                <a:spcPts val="1600"/>
-              </a:lnSpc>
-              <a:buNone/>
-            </a:pPr>
-            <a:r>
-              <a:rPr lang="en-US" sz="1350" b="1" dirty="0">
-                <a:solidFill>
-                  <a:srgbClr val="FFFFFF"/>
-                </a:solidFill>
-                <a:latin typeface="Palatino Linotype" pitchFamily="34" charset="0"/>
-                <a:ea typeface="Palatino Linotype" pitchFamily="34" charset="-122"/>
-                <a:cs typeface="Palatino Linotype" pitchFamily="34" charset="-120"/>
-              </a:rPr>
-              <a:t>1. Argument</a:t>
-            </a:r>
-            <a:endParaRPr lang="en-US" sz="1350" dirty="0"/>
-          </a:p>
-        </p:txBody>
-      </p:sp>
-      <p:sp>
-        <p:nvSpPr>
-          <p:cNvPr id="9" name="Text 7"/>
-          <p:cNvSpPr/>
-          <p:nvPr/>
-        </p:nvSpPr>
-        <p:spPr>
-          <a:xfrm>
-            <a:off x="3520440" y="2414016"/>
-            <a:ext cx="5852160" cy="612648"/>
-          </a:xfrm>
-          <a:prstGeom prst="rect">
-            <a:avLst/>
-          </a:prstGeom>
-          <a:noFill/>
-          <a:ln/>
-        </p:spPr>
-        <p:txBody>
-          <a:bodyPr wrap="square" lIns="0" tIns="0" rIns="0" bIns="0" rtlCol="0" anchor="ctr"/>
-          <a:lstStyle/>
-          <a:p>
-            <a:pPr indent="0" marL="0">
-              <a:lnSpc>
-                <a:spcPts val="1600"/>
-              </a:lnSpc>
-              <a:buNone/>
-            </a:pPr>
-            <a:r>
-              <a:rPr lang="en-US" sz="1350" dirty="0">
-                <a:solidFill>
-                  <a:srgbClr val="959BB0"/>
-                </a:solidFill>
-                <a:latin typeface="Palatino Linotype" pitchFamily="34" charset="0"/>
-                <a:ea typeface="Palatino Linotype" pitchFamily="34" charset="-122"/>
-                <a:cs typeface="Palatino Linotype" pitchFamily="34" charset="-120"/>
-              </a:rPr>
-              <a:t>Claritatea și coerența poziției susținute</a:t>
-            </a:r>
-            <a:endParaRPr lang="en-US" sz="1350" dirty="0"/>
-          </a:p>
-        </p:txBody>
-      </p:sp>
-      <p:sp>
-        <p:nvSpPr>
-          <p:cNvPr id="10" name="Text 8"/>
-          <p:cNvSpPr/>
-          <p:nvPr/>
-        </p:nvSpPr>
-        <p:spPr>
-          <a:xfrm>
-            <a:off x="9555480" y="2414016"/>
-            <a:ext cx="1828800" cy="612648"/>
-          </a:xfrm>
-          <a:prstGeom prst="rect">
-            <a:avLst/>
-          </a:prstGeom>
-          <a:noFill/>
-          <a:ln/>
-        </p:spPr>
-        <p:txBody>
-          <a:bodyPr wrap="square" lIns="0" tIns="0" rIns="0" bIns="0" rtlCol="0" anchor="ctr"/>
-          <a:lstStyle/>
-          <a:p>
-            <a:pPr indent="0" marL="0">
-              <a:lnSpc>
-                <a:spcPts val="1600"/>
-              </a:lnSpc>
-              <a:buNone/>
-            </a:pPr>
-            <a:r>
-              <a:rPr lang="en-US" sz="1350" dirty="0">
-                <a:solidFill>
-                  <a:srgbClr val="959BB0"/>
-                </a:solidFill>
-                <a:latin typeface="Palatino Linotype" pitchFamily="34" charset="0"/>
-                <a:ea typeface="Palatino Linotype" pitchFamily="34" charset="-122"/>
-                <a:cs typeface="Palatino Linotype" pitchFamily="34" charset="-120"/>
-              </a:rPr>
-              <a:t>0 – 5</a:t>
-            </a:r>
-            <a:endParaRPr lang="en-US" sz="1350" dirty="0"/>
-          </a:p>
-        </p:txBody>
-      </p:sp>
-      <p:sp>
-        <p:nvSpPr>
-          <p:cNvPr id="11" name="Text 9"/>
-          <p:cNvSpPr/>
-          <p:nvPr/>
-        </p:nvSpPr>
-        <p:spPr>
-          <a:xfrm>
-            <a:off x="868680" y="3072384"/>
-            <a:ext cx="2651760" cy="612648"/>
-          </a:xfrm>
-          <a:prstGeom prst="rect">
-            <a:avLst/>
-          </a:prstGeom>
-          <a:noFill/>
-          <a:ln/>
-        </p:spPr>
-        <p:txBody>
-          <a:bodyPr wrap="square" lIns="0" tIns="0" rIns="0" bIns="0" rtlCol="0" anchor="ctr"/>
-          <a:lstStyle/>
-          <a:p>
-            <a:pPr indent="0" marL="0">
-              <a:lnSpc>
-                <a:spcPts val="1600"/>
-              </a:lnSpc>
-              <a:buNone/>
-            </a:pPr>
-            <a:r>
-              <a:rPr lang="en-US" sz="1350" b="1" dirty="0">
-                <a:solidFill>
-                  <a:srgbClr val="FFFFFF"/>
-                </a:solidFill>
-                <a:latin typeface="Palatino Linotype" pitchFamily="34" charset="0"/>
-                <a:ea typeface="Palatino Linotype" pitchFamily="34" charset="-122"/>
-                <a:cs typeface="Palatino Linotype" pitchFamily="34" charset="-120"/>
-              </a:rPr>
-              <a:t>2. Dovezi</a:t>
-            </a:r>
-            <a:endParaRPr lang="en-US" sz="1350" dirty="0"/>
-          </a:p>
-        </p:txBody>
-      </p:sp>
-      <p:sp>
-        <p:nvSpPr>
-          <p:cNvPr id="12" name="Text 10"/>
-          <p:cNvSpPr/>
-          <p:nvPr/>
-        </p:nvSpPr>
-        <p:spPr>
-          <a:xfrm>
-            <a:off x="3520440" y="3072384"/>
-            <a:ext cx="5852160" cy="612648"/>
-          </a:xfrm>
-          <a:prstGeom prst="rect">
-            <a:avLst/>
-          </a:prstGeom>
-          <a:noFill/>
-          <a:ln/>
-        </p:spPr>
-        <p:txBody>
-          <a:bodyPr wrap="square" lIns="0" tIns="0" rIns="0" bIns="0" rtlCol="0" anchor="ctr"/>
-          <a:lstStyle/>
-          <a:p>
-            <a:pPr indent="0" marL="0">
-              <a:lnSpc>
-                <a:spcPts val="1600"/>
-              </a:lnSpc>
-              <a:buNone/>
-            </a:pPr>
-            <a:r>
-              <a:rPr lang="en-US" sz="1350" dirty="0">
-                <a:solidFill>
-                  <a:srgbClr val="959BB0"/>
-                </a:solidFill>
-                <a:latin typeface="Palatino Linotype" pitchFamily="34" charset="0"/>
-                <a:ea typeface="Palatino Linotype" pitchFamily="34" charset="-122"/>
-                <a:cs typeface="Palatino Linotype" pitchFamily="34" charset="-120"/>
-              </a:rPr>
-              <a:t>Surse verificabile, cu identificator, an de referință și populație</a:t>
-            </a:r>
-            <a:endParaRPr lang="en-US" sz="1350" dirty="0"/>
-          </a:p>
-        </p:txBody>
-      </p:sp>
-      <p:sp>
-        <p:nvSpPr>
-          <p:cNvPr id="13" name="Text 11"/>
-          <p:cNvSpPr/>
-          <p:nvPr/>
-        </p:nvSpPr>
-        <p:spPr>
-          <a:xfrm>
-            <a:off x="9555480" y="3072384"/>
-            <a:ext cx="1828800" cy="612648"/>
-          </a:xfrm>
-          <a:prstGeom prst="rect">
-            <a:avLst/>
-          </a:prstGeom>
-          <a:noFill/>
-          <a:ln/>
-        </p:spPr>
-        <p:txBody>
-          <a:bodyPr wrap="square" lIns="0" tIns="0" rIns="0" bIns="0" rtlCol="0" anchor="ctr"/>
-          <a:lstStyle/>
-          <a:p>
-            <a:pPr indent="0" marL="0">
-              <a:lnSpc>
-                <a:spcPts val="1600"/>
-              </a:lnSpc>
-              <a:buNone/>
-            </a:pPr>
-            <a:r>
-              <a:rPr lang="en-US" sz="1350" dirty="0">
-                <a:solidFill>
-                  <a:srgbClr val="959BB0"/>
-                </a:solidFill>
-                <a:latin typeface="Palatino Linotype" pitchFamily="34" charset="0"/>
-                <a:ea typeface="Palatino Linotype" pitchFamily="34" charset="-122"/>
-                <a:cs typeface="Palatino Linotype" pitchFamily="34" charset="-120"/>
-              </a:rPr>
-              <a:t>0 – 5</a:t>
-            </a:r>
-            <a:endParaRPr lang="en-US" sz="1350" dirty="0"/>
-          </a:p>
-        </p:txBody>
-      </p:sp>
-      <p:sp>
-        <p:nvSpPr>
-          <p:cNvPr id="14" name="Shape 12"/>
-          <p:cNvSpPr/>
-          <p:nvPr/>
-        </p:nvSpPr>
-        <p:spPr>
-          <a:xfrm>
-            <a:off x="594360" y="3730752"/>
-            <a:ext cx="10972800" cy="612648"/>
-          </a:xfrm>
-          <a:prstGeom prst="roundRect">
-            <a:avLst>
-              <a:gd name="adj" fmla="val 13433"/>
-            </a:avLst>
-          </a:prstGeom>
-          <a:solidFill>
-            <a:srgbClr val="1D1F2B"/>
-          </a:solidFill>
-          <a:ln w="12700">
-            <a:solidFill>
-              <a:srgbClr val="1D1F2B"/>
-            </a:solidFill>
-            <a:prstDash val="solid"/>
-          </a:ln>
-        </p:spPr>
-        <p:txBody>
-          <a:bodyPr/>
-          <a:p/>
-        </p:txBody>
-      </p:sp>
-      <p:sp>
-        <p:nvSpPr>
-          <p:cNvPr id="15" name="Text 13"/>
-          <p:cNvSpPr/>
-          <p:nvPr/>
-        </p:nvSpPr>
-        <p:spPr>
-          <a:xfrm>
-            <a:off x="868680" y="3730752"/>
-            <a:ext cx="2651760" cy="612648"/>
-          </a:xfrm>
-          <a:prstGeom prst="rect">
-            <a:avLst/>
-          </a:prstGeom>
-          <a:noFill/>
-          <a:ln/>
-        </p:spPr>
-        <p:txBody>
-          <a:bodyPr wrap="square" lIns="0" tIns="0" rIns="0" bIns="0" rtlCol="0" anchor="ctr"/>
-          <a:lstStyle/>
-          <a:p>
-            <a:pPr indent="0" marL="0">
-              <a:lnSpc>
-                <a:spcPts val="1600"/>
-              </a:lnSpc>
-              <a:buNone/>
-            </a:pPr>
-            <a:r>
-              <a:rPr lang="en-US" sz="1350" b="1" dirty="0">
-                <a:solidFill>
-                  <a:srgbClr val="FFFFFF"/>
-                </a:solidFill>
-                <a:latin typeface="Palatino Linotype" pitchFamily="34" charset="0"/>
-                <a:ea typeface="Palatino Linotype" pitchFamily="34" charset="-122"/>
-                <a:cs typeface="Palatino Linotype" pitchFamily="34" charset="-120"/>
-              </a:rPr>
-              <a:t>3. Contraargument</a:t>
-            </a:r>
-            <a:endParaRPr lang="en-US" sz="1350" dirty="0"/>
-          </a:p>
-        </p:txBody>
-      </p:sp>
-      <p:sp>
-        <p:nvSpPr>
-          <p:cNvPr id="16" name="Text 14"/>
-          <p:cNvSpPr/>
-          <p:nvPr/>
-        </p:nvSpPr>
-        <p:spPr>
-          <a:xfrm>
-            <a:off x="3520440" y="3730752"/>
-            <a:ext cx="5852160" cy="612648"/>
-          </a:xfrm>
-          <a:prstGeom prst="rect">
-            <a:avLst/>
-          </a:prstGeom>
-          <a:noFill/>
-          <a:ln/>
-        </p:spPr>
-        <p:txBody>
-          <a:bodyPr wrap="square" lIns="0" tIns="0" rIns="0" bIns="0" rtlCol="0" anchor="ctr"/>
-          <a:lstStyle/>
-          <a:p>
-            <a:pPr indent="0" marL="0">
-              <a:lnSpc>
-                <a:spcPts val="1600"/>
-              </a:lnSpc>
-              <a:buNone/>
-            </a:pPr>
-            <a:r>
-              <a:rPr lang="en-US" sz="1350" dirty="0">
-                <a:solidFill>
-                  <a:srgbClr val="959BB0"/>
-                </a:solidFill>
-                <a:latin typeface="Palatino Linotype" pitchFamily="34" charset="0"/>
-                <a:ea typeface="Palatino Linotype" pitchFamily="34" charset="-122"/>
-                <a:cs typeface="Palatino Linotype" pitchFamily="34" charset="-120"/>
-              </a:rPr>
-              <a:t>Capacitatea de a răspunde argumentului advers</a:t>
-            </a:r>
-            <a:endParaRPr lang="en-US" sz="1350" dirty="0"/>
-          </a:p>
-        </p:txBody>
-      </p:sp>
-      <p:sp>
-        <p:nvSpPr>
-          <p:cNvPr id="17" name="Text 15"/>
-          <p:cNvSpPr/>
-          <p:nvPr/>
-        </p:nvSpPr>
-        <p:spPr>
-          <a:xfrm>
-            <a:off x="9555480" y="3730752"/>
-            <a:ext cx="1828800" cy="612648"/>
-          </a:xfrm>
-          <a:prstGeom prst="rect">
-            <a:avLst/>
-          </a:prstGeom>
-          <a:noFill/>
-          <a:ln/>
-        </p:spPr>
-        <p:txBody>
-          <a:bodyPr wrap="square" lIns="0" tIns="0" rIns="0" bIns="0" rtlCol="0" anchor="ctr"/>
-          <a:lstStyle/>
-          <a:p>
-            <a:pPr indent="0" marL="0">
-              <a:lnSpc>
-                <a:spcPts val="1600"/>
-              </a:lnSpc>
-              <a:buNone/>
-            </a:pPr>
-            <a:r>
-              <a:rPr lang="en-US" sz="1350" dirty="0">
-                <a:solidFill>
-                  <a:srgbClr val="959BB0"/>
-                </a:solidFill>
-                <a:latin typeface="Palatino Linotype" pitchFamily="34" charset="0"/>
-                <a:ea typeface="Palatino Linotype" pitchFamily="34" charset="-122"/>
-                <a:cs typeface="Palatino Linotype" pitchFamily="34" charset="-120"/>
-              </a:rPr>
-              <a:t>0 – 5</a:t>
-            </a:r>
-            <a:endParaRPr lang="en-US" sz="1350" dirty="0"/>
-          </a:p>
-        </p:txBody>
-      </p:sp>
-      <p:sp>
-        <p:nvSpPr>
-          <p:cNvPr id="18" name="Text 16"/>
-          <p:cNvSpPr/>
-          <p:nvPr/>
-        </p:nvSpPr>
-        <p:spPr>
-          <a:xfrm>
-            <a:off x="868680" y="4389120"/>
-            <a:ext cx="2651760" cy="612648"/>
-          </a:xfrm>
-          <a:prstGeom prst="rect">
-            <a:avLst/>
-          </a:prstGeom>
-          <a:noFill/>
-          <a:ln/>
-        </p:spPr>
-        <p:txBody>
-          <a:bodyPr wrap="square" lIns="0" tIns="0" rIns="0" bIns="0" rtlCol="0" anchor="ctr"/>
-          <a:lstStyle/>
-          <a:p>
-            <a:pPr indent="0" marL="0">
-              <a:lnSpc>
-                <a:spcPts val="1600"/>
-              </a:lnSpc>
-              <a:buNone/>
-            </a:pPr>
-            <a:r>
-              <a:rPr lang="en-US" sz="1350" b="1" dirty="0">
-                <a:solidFill>
-                  <a:srgbClr val="FFFFFF"/>
-                </a:solidFill>
-                <a:latin typeface="Palatino Linotype" pitchFamily="34" charset="0"/>
-                <a:ea typeface="Palatino Linotype" pitchFamily="34" charset="-122"/>
-                <a:cs typeface="Palatino Linotype" pitchFamily="34" charset="-120"/>
-              </a:rPr>
-              <a:t>4. Dovada contrară</a:t>
-            </a:r>
-            <a:endParaRPr lang="en-US" sz="1350" dirty="0"/>
-          </a:p>
-        </p:txBody>
-      </p:sp>
-      <p:sp>
-        <p:nvSpPr>
-          <p:cNvPr id="19" name="Text 17"/>
-          <p:cNvSpPr/>
-          <p:nvPr/>
-        </p:nvSpPr>
-        <p:spPr>
-          <a:xfrm>
-            <a:off x="3520440" y="4389120"/>
-            <a:ext cx="5852160" cy="612648"/>
-          </a:xfrm>
-          <a:prstGeom prst="rect">
-            <a:avLst/>
-          </a:prstGeom>
-          <a:noFill/>
-          <a:ln/>
-        </p:spPr>
-        <p:txBody>
-          <a:bodyPr wrap="square" lIns="0" tIns="0" rIns="0" bIns="0" rtlCol="0" anchor="ctr"/>
-          <a:lstStyle/>
-          <a:p>
-            <a:pPr indent="0" marL="0">
-              <a:lnSpc>
-                <a:spcPts val="1600"/>
-              </a:lnSpc>
-              <a:buNone/>
-            </a:pPr>
-            <a:r>
-              <a:rPr lang="en-US" sz="1350" dirty="0">
-                <a:solidFill>
-                  <a:srgbClr val="959BB0"/>
-                </a:solidFill>
-                <a:latin typeface="Palatino Linotype" pitchFamily="34" charset="0"/>
-                <a:ea typeface="Palatino Linotype" pitchFamily="34" charset="-122"/>
-                <a:cs typeface="Palatino Linotype" pitchFamily="34" charset="-120"/>
-              </a:rPr>
-              <a:t>Cum integrați cifra din plicul sigilat</a:t>
-            </a:r>
-            <a:endParaRPr lang="en-US" sz="1350" dirty="0"/>
-          </a:p>
-        </p:txBody>
-      </p:sp>
-      <p:sp>
-        <p:nvSpPr>
-          <p:cNvPr id="20" name="Text 18"/>
-          <p:cNvSpPr/>
-          <p:nvPr/>
-        </p:nvSpPr>
-        <p:spPr>
-          <a:xfrm>
-            <a:off x="9555480" y="4389120"/>
-            <a:ext cx="1828800" cy="612648"/>
-          </a:xfrm>
-          <a:prstGeom prst="rect">
-            <a:avLst/>
-          </a:prstGeom>
-          <a:noFill/>
-          <a:ln/>
-        </p:spPr>
-        <p:txBody>
-          <a:bodyPr wrap="square" lIns="0" tIns="0" rIns="0" bIns="0" rtlCol="0" anchor="ctr"/>
-          <a:lstStyle/>
-          <a:p>
-            <a:pPr indent="0" marL="0">
-              <a:lnSpc>
-                <a:spcPts val="1600"/>
-              </a:lnSpc>
-              <a:buNone/>
-            </a:pPr>
-            <a:r>
-              <a:rPr lang="en-US" sz="1350" dirty="0">
-                <a:solidFill>
-                  <a:srgbClr val="959BB0"/>
-                </a:solidFill>
-                <a:latin typeface="Palatino Linotype" pitchFamily="34" charset="0"/>
-                <a:ea typeface="Palatino Linotype" pitchFamily="34" charset="-122"/>
-                <a:cs typeface="Palatino Linotype" pitchFamily="34" charset="-120"/>
-              </a:rPr>
-              <a:t>0 – 5</a:t>
-            </a:r>
-            <a:endParaRPr lang="en-US" sz="1350" dirty="0"/>
-          </a:p>
-        </p:txBody>
-      </p:sp>
-      <p:sp>
-        <p:nvSpPr>
-          <p:cNvPr id="21" name="Shape 19"/>
-          <p:cNvSpPr/>
-          <p:nvPr/>
-        </p:nvSpPr>
-        <p:spPr>
-          <a:xfrm>
-            <a:off x="594360" y="5120640"/>
-            <a:ext cx="10972800" cy="1060704"/>
-          </a:xfrm>
-          <a:prstGeom prst="roundRect">
-            <a:avLst>
-              <a:gd name="adj" fmla="val 7759"/>
-            </a:avLst>
-          </a:prstGeom>
-          <a:solidFill>
-            <a:srgbClr val="07564B"/>
-          </a:solidFill>
-          <a:ln w="12700">
-            <a:solidFill>
-              <a:srgbClr val="07564B"/>
-            </a:solidFill>
-            <a:prstDash val="solid"/>
-          </a:ln>
-        </p:spPr>
-        <p:txBody>
-          <a:bodyPr/>
-          <a:p/>
-        </p:txBody>
-      </p:sp>
-      <p:sp>
-        <p:nvSpPr>
-          <p:cNvPr id="22" name="Text 20"/>
-          <p:cNvSpPr/>
-          <p:nvPr/>
-        </p:nvSpPr>
-        <p:spPr>
-          <a:xfrm>
-            <a:off x="868680" y="5248656"/>
-            <a:ext cx="10424160" cy="256032"/>
-          </a:xfrm>
-          <a:prstGeom prst="rect">
-            <a:avLst/>
-          </a:prstGeom>
-          <a:noFill/>
-          <a:ln/>
-        </p:spPr>
-        <p:txBody>
-          <a:bodyPr wrap="square" lIns="0" tIns="0" rIns="0" bIns="0" rtlCol="0" anchor="t"/>
-          <a:lstStyle/>
-          <a:p>
-            <a:pPr algn="l" indent="0" marL="0">
-              <a:lnSpc>
-                <a:spcPts val="1800"/>
-              </a:lnSpc>
-              <a:buNone/>
-            </a:pPr>
-            <a:r>
-              <a:rPr lang="en-US" sz="1000" b="1" spc="200" kern="0" dirty="0">
-                <a:solidFill>
-                  <a:srgbClr val="FFFFFF"/>
-                </a:solidFill>
-                <a:latin typeface="Palatino Linotype" pitchFamily="34" charset="0"/>
-                <a:ea typeface="Palatino Linotype" pitchFamily="34" charset="-122"/>
-                <a:cs typeface="Palatino Linotype" pitchFamily="34" charset="-120"/>
-              </a:rPr>
-              <a:t>REGULA DE CONVERSIE</a:t>
-            </a:r>
-            <a:endParaRPr lang="en-US" sz="1000" dirty="0"/>
-          </a:p>
-        </p:txBody>
-      </p:sp>
-      <p:sp>
-        <p:nvSpPr>
-          <p:cNvPr id="23" name="Text 21"/>
-          <p:cNvSpPr/>
-          <p:nvPr/>
-        </p:nvSpPr>
-        <p:spPr>
-          <a:xfrm>
-            <a:off x="868680" y="5541264"/>
-            <a:ext cx="10424160" cy="566928"/>
-          </a:xfrm>
-          <a:prstGeom prst="rect">
-            <a:avLst/>
-          </a:prstGeom>
-          <a:noFill/>
-          <a:ln/>
-        </p:spPr>
-        <p:txBody>
-          <a:bodyPr wrap="square" lIns="0" tIns="0" rIns="0" bIns="0" rtlCol="0" anchor="t"/>
-          <a:lstStyle/>
-          <a:p>
-            <a:pPr algn="l" indent="0" marL="0">
-              <a:lnSpc>
-                <a:spcPts val="1900"/>
-              </a:lnSpc>
-              <a:buNone/>
-            </a:pPr>
-            <a:r>
-              <a:rPr lang="en-US" sz="1500" b="1" dirty="0">
-                <a:solidFill>
-                  <a:srgbClr val="FFFFFF"/>
-                </a:solidFill>
-                <a:latin typeface="Palatino Linotype" pitchFamily="34" charset="0"/>
-                <a:ea typeface="Palatino Linotype" pitchFamily="34" charset="-122"/>
-                <a:cs typeface="Palatino Linotype" pitchFamily="34" charset="-120"/>
-              </a:rPr>
-              <a:t>Nota pe scala 0–10 = total brut ÷ 2. Un total de 20 înseamnă 10,00. Un total de 9 înseamnă 4,50, sub pragul de promovare al componentei (pragul se aplică mediei celor trei dezbateri).</a:t>
-            </a:r>
-            <a:endParaRPr lang="en-US" sz="1500" dirty="0"/>
-          </a:p>
-        </p:txBody>
-      </p:sp>
-    </p:spTree>
-  </p:cSld>
-  <p:clrMapOvr>
-    <a:masterClrMapping/>
-  </p:clrMapOvr>
-</p:sld>
-</file>
-
-<file path=ppt/slides/slide51.xml><?xml version="1.0" encoding="utf-8"?>
-<p:sld xmlns:a="http://schemas.openxmlformats.org/drawingml/2006/main" xmlns:r="http://schemas.openxmlformats.org/officeDocument/2006/relationships" xmlns:p="http://schemas.openxmlformats.org/presentationml/2006/main">
-  <p:cSld name="Slide 49">
-    <p:bg>
-      <p:bgPr>
-        <a:solidFill>
-          <a:srgbClr val="9B7EF7"/>
-        </a:solidFill>
-      </p:bgPr>
-    </p:bg>
-    <p:spTree>
-      <p:nvGrpSpPr>
-        <p:cNvPr id="1" name=""/>
-        <p:cNvGrpSpPr/>
-        <p:nvPr/>
-      </p:nvGrpSpPr>
-      <p:grpSpPr>
-        <a:xfrm>
-          <a:off x="0" y="0"/>
-          <a:ext cx="0" cy="0"/>
-          <a:chOff x="0" y="0"/>
-          <a:chExt cx="0" cy="0"/>
-        </a:xfrm>
-      </p:grpSpPr>
-      <p:sp>
-        <p:nvSpPr>
-          <p:cNvPr id="2" name="Shape 0"/>
-          <p:cNvSpPr/>
-          <p:nvPr/>
-        </p:nvSpPr>
-        <p:spPr>
-          <a:xfrm>
-            <a:off x="594360" y="384048"/>
-            <a:ext cx="2286000" cy="310896"/>
-          </a:xfrm>
-          <a:prstGeom prst="roundRect">
-            <a:avLst>
-              <a:gd name="adj" fmla="val 50000"/>
-            </a:avLst>
-          </a:prstGeom>
-          <a:solidFill>
-            <a:srgbClr val="1F1040"/>
-          </a:solidFill>
-          <a:ln w="12700">
-            <a:solidFill>
-              <a:srgbClr val="1F1040"/>
-            </a:solidFill>
-            <a:prstDash val="solid"/>
-          </a:ln>
-        </p:spPr>
-        <p:txBody>
-          <a:bodyPr/>
-          <a:p/>
-        </p:txBody>
-      </p:sp>
-      <p:sp>
-        <p:nvSpPr>
-          <p:cNvPr id="3" name="Text 1"/>
-          <p:cNvSpPr/>
-          <p:nvPr/>
-        </p:nvSpPr>
-        <p:spPr>
-          <a:xfrm>
-            <a:off x="594360" y="384048"/>
-            <a:ext cx="2286000" cy="310896"/>
-          </a:xfrm>
-          <a:prstGeom prst="rect">
-            <a:avLst/>
-          </a:prstGeom>
-          <a:noFill/>
-          <a:ln/>
-        </p:spPr>
-        <p:txBody>
-          <a:bodyPr wrap="square" lIns="0" tIns="0" rIns="0" bIns="0" rtlCol="0" anchor="ctr"/>
-          <a:lstStyle/>
-          <a:p>
-            <a:pPr algn="ctr" indent="0" marL="0">
-              <a:buNone/>
-            </a:pPr>
-            <a:r>
-              <a:rPr lang="en-US" sz="1000" b="1" dirty="0">
-                <a:solidFill>
-                  <a:srgbClr val="9B7EF7"/>
-                </a:solidFill>
-                <a:latin typeface="Palatino Linotype" pitchFamily="34" charset="0"/>
-                <a:ea typeface="Palatino Linotype" pitchFamily="34" charset="-122"/>
-                <a:cs typeface="Palatino Linotype" pitchFamily="34" charset="-120"/>
-              </a:rPr>
-              <a:t>CRITERIUL 4 · MECANISM</a:t>
-            </a:r>
-            <a:endParaRPr lang="en-US" sz="1000" dirty="0"/>
-          </a:p>
-        </p:txBody>
-      </p:sp>
-      <p:sp>
-        <p:nvSpPr>
-          <p:cNvPr id="4" name="Text 2"/>
-          <p:cNvSpPr/>
-          <p:nvPr/>
-        </p:nvSpPr>
-        <p:spPr>
-          <a:xfrm>
-            <a:off x="594360" y="960120"/>
-            <a:ext cx="10972800" cy="777240"/>
-          </a:xfrm>
-          <a:prstGeom prst="rect">
-            <a:avLst/>
-          </a:prstGeom>
-          <a:noFill/>
-          <a:ln/>
-        </p:spPr>
-        <p:txBody>
-          <a:bodyPr wrap="square" lIns="0" tIns="0" rIns="0" bIns="0" rtlCol="0" anchor="ctr"/>
-          <a:lstStyle/>
-          <a:p>
-            <a:pPr indent="0" marL="0">
-              <a:buNone/>
-            </a:pPr>
-            <a:r>
-              <a:rPr lang="en-US" sz="3000" b="1" dirty="0">
-                <a:solidFill>
-                  <a:srgbClr val="1F1040"/>
-                </a:solidFill>
-                <a:latin typeface="Palatino Linotype" pitchFamily="34" charset="0"/>
-                <a:ea typeface="Palatino Linotype" pitchFamily="34" charset="-122"/>
-                <a:cs typeface="Palatino Linotype" pitchFamily="34" charset="-120"/>
-              </a:rPr>
-              <a:t>La minutul 6, fiecare echipă primește un plic sigilat</a:t>
-            </a:r>
-            <a:endParaRPr lang="en-US" sz="3000" dirty="0"/>
-          </a:p>
-        </p:txBody>
-      </p:sp>
-      <p:sp>
-        <p:nvSpPr>
-          <p:cNvPr id="5" name="Shape 3"/>
-          <p:cNvSpPr/>
-          <p:nvPr/>
-        </p:nvSpPr>
-        <p:spPr>
-          <a:xfrm>
-            <a:off x="594360" y="1965960"/>
-            <a:ext cx="10972800" cy="1417320"/>
-          </a:xfrm>
-          <a:prstGeom prst="roundRect">
-            <a:avLst>
-              <a:gd name="adj" fmla="val 5806"/>
-            </a:avLst>
-          </a:prstGeom>
-          <a:solidFill>
-            <a:srgbClr val="FFFFFF"/>
-          </a:solidFill>
-          <a:ln w="12700">
-            <a:solidFill>
-              <a:srgbClr val="FFFFFF"/>
-            </a:solidFill>
-            <a:prstDash val="solid"/>
-          </a:ln>
-        </p:spPr>
-        <p:txBody>
-          <a:bodyPr/>
-          <a:p/>
-        </p:txBody>
-      </p:sp>
-      <p:sp>
-        <p:nvSpPr>
-          <p:cNvPr id="6" name="Text 4"/>
-          <p:cNvSpPr/>
-          <p:nvPr/>
-        </p:nvSpPr>
-        <p:spPr>
-          <a:xfrm>
-            <a:off x="868680" y="2176272"/>
-            <a:ext cx="10424160" cy="1051560"/>
-          </a:xfrm>
-          <a:prstGeom prst="rect">
-            <a:avLst/>
-          </a:prstGeom>
-          <a:noFill/>
-          <a:ln/>
-        </p:spPr>
-        <p:txBody>
-          <a:bodyPr wrap="square" lIns="0" tIns="0" rIns="0" bIns="0" rtlCol="0" anchor="t"/>
-          <a:lstStyle/>
-          <a:p>
-            <a:pPr algn="l" indent="0" marL="0">
-              <a:lnSpc>
-                <a:spcPts val="2200"/>
-              </a:lnSpc>
-              <a:buNone/>
-            </a:pPr>
-            <a:r>
-              <a:rPr lang="en-US" sz="1550" dirty="0">
-                <a:solidFill>
-                  <a:srgbClr val="11121A"/>
-                </a:solidFill>
-                <a:latin typeface="Palatino Linotype" pitchFamily="34" charset="0"/>
-                <a:ea typeface="Palatino Linotype" pitchFamily="34" charset="-122"/>
-                <a:cs typeface="Palatino Linotype" pitchFamily="34" charset="-120"/>
-              </a:rPr>
-              <a:t>În el se află o cifră reală, publicată, cu identificator și an de referință, CARE CONTRAZICE POZIȚIA PE CARE ECHIPA O SUSȚINE. Plicurile se distribuie simultan tuturor echipelor. Ce faceți cu acea cifră în restul dezbaterii se notează cu până la cinci puncte.</a:t>
-            </a:r>
-            <a:endParaRPr lang="en-US" sz="1550" dirty="0"/>
-          </a:p>
-        </p:txBody>
-      </p:sp>
-      <p:sp>
-        <p:nvSpPr>
-          <p:cNvPr id="7" name="Shape 5"/>
-          <p:cNvSpPr/>
-          <p:nvPr/>
-        </p:nvSpPr>
-        <p:spPr>
-          <a:xfrm>
-            <a:off x="594360" y="3566160"/>
-            <a:ext cx="5349240" cy="1005840"/>
-          </a:xfrm>
-          <a:prstGeom prst="roundRect">
-            <a:avLst>
-              <a:gd name="adj" fmla="val 8182"/>
-            </a:avLst>
-          </a:prstGeom>
-          <a:solidFill>
-            <a:srgbClr val="6B4FC9"/>
-          </a:solidFill>
-          <a:ln w="12700">
-            <a:solidFill>
-              <a:srgbClr val="6B4FC9"/>
-            </a:solidFill>
-            <a:prstDash val="solid"/>
-          </a:ln>
-        </p:spPr>
-        <p:txBody>
-          <a:bodyPr/>
-          <a:p/>
-        </p:txBody>
-      </p:sp>
-      <p:sp>
-        <p:nvSpPr>
-          <p:cNvPr id="8" name="Text 6"/>
-          <p:cNvSpPr/>
-          <p:nvPr/>
-        </p:nvSpPr>
-        <p:spPr>
-          <a:xfrm>
-            <a:off x="868680" y="3730752"/>
-            <a:ext cx="4800600" cy="777240"/>
-          </a:xfrm>
-          <a:prstGeom prst="rect">
-            <a:avLst/>
-          </a:prstGeom>
-          <a:noFill/>
-          <a:ln/>
-        </p:spPr>
-        <p:txBody>
-          <a:bodyPr wrap="square" lIns="0" tIns="0" rIns="0" bIns="0" rtlCol="0" anchor="t"/>
-          <a:lstStyle/>
-          <a:p>
-            <a:pPr algn="l" indent="0" marL="0">
-              <a:lnSpc>
-                <a:spcPts val="1800"/>
-              </a:lnSpc>
-              <a:buNone/>
-            </a:pPr>
-            <a:r>
-              <a:rPr lang="en-US" sz="1350" b="1" dirty="0">
-                <a:solidFill>
-                  <a:srgbClr val="FFFFFF"/>
-                </a:solidFill>
-                <a:latin typeface="Palatino Linotype" pitchFamily="34" charset="0"/>
-                <a:ea typeface="Palatino Linotype" pitchFamily="34" charset="-122"/>
-                <a:cs typeface="Palatino Linotype" pitchFamily="34" charset="-120"/>
-              </a:rPr>
-              <a:t>O echipă care nu deschide plicul sau nu se referă la conținutul lui primește ZERO la acest criteriu, adică pierde până la un sfert din notă (2,5 puncte din 10).</a:t>
-            </a:r>
-            <a:endParaRPr lang="en-US" sz="1350" dirty="0"/>
-          </a:p>
-        </p:txBody>
-      </p:sp>
-      <p:sp>
-        <p:nvSpPr>
-          <p:cNvPr id="9" name="Shape 7"/>
-          <p:cNvSpPr/>
-          <p:nvPr/>
-        </p:nvSpPr>
-        <p:spPr>
-          <a:xfrm>
-            <a:off x="6217920" y="3566160"/>
-            <a:ext cx="5349240" cy="1005840"/>
-          </a:xfrm>
-          <a:prstGeom prst="roundRect">
-            <a:avLst>
-              <a:gd name="adj" fmla="val 8182"/>
-            </a:avLst>
-          </a:prstGeom>
-          <a:solidFill>
-            <a:srgbClr val="6B4FC9"/>
-          </a:solidFill>
-          <a:ln w="12700">
-            <a:solidFill>
-              <a:srgbClr val="6B4FC9"/>
-            </a:solidFill>
-            <a:prstDash val="solid"/>
-          </a:ln>
-        </p:spPr>
-        <p:txBody>
-          <a:bodyPr/>
-          <a:p/>
-        </p:txBody>
-      </p:sp>
-      <p:sp>
-        <p:nvSpPr>
-          <p:cNvPr id="10" name="Text 8"/>
-          <p:cNvSpPr/>
-          <p:nvPr/>
-        </p:nvSpPr>
-        <p:spPr>
-          <a:xfrm>
-            <a:off x="6492240" y="3730752"/>
-            <a:ext cx="4800600" cy="777240"/>
-          </a:xfrm>
-          <a:prstGeom prst="rect">
-            <a:avLst/>
-          </a:prstGeom>
-          <a:noFill/>
-          <a:ln/>
-        </p:spPr>
-        <p:txBody>
-          <a:bodyPr wrap="square" lIns="0" tIns="0" rIns="0" bIns="0" rtlCol="0" anchor="t"/>
-          <a:lstStyle/>
-          <a:p>
-            <a:pPr algn="l" indent="0" marL="0">
-              <a:lnSpc>
-                <a:spcPts val="1800"/>
-              </a:lnSpc>
-              <a:buNone/>
-            </a:pPr>
-            <a:r>
-              <a:rPr lang="en-US" sz="1350" b="1" dirty="0">
-                <a:solidFill>
-                  <a:srgbClr val="FFFFFF"/>
-                </a:solidFill>
-                <a:latin typeface="Palatino Linotype" pitchFamily="34" charset="0"/>
-                <a:ea typeface="Palatino Linotype" pitchFamily="34" charset="-122"/>
-                <a:cs typeface="Palatino Linotype" pitchFamily="34" charset="-120"/>
-              </a:rPr>
-              <a:t>Repartizarea pozițiilor se face PRIN TRAGERE LA SORȚI. Refuzul motivat nu se penalizează: primiți poziție alternativă sau rol în juriu.</a:t>
-            </a:r>
-            <a:endParaRPr lang="en-US" sz="1350" dirty="0"/>
-          </a:p>
-        </p:txBody>
-      </p:sp>
-      <p:sp>
-        <p:nvSpPr>
-          <p:cNvPr id="11" name="Shape 9"/>
-          <p:cNvSpPr/>
-          <p:nvPr/>
-        </p:nvSpPr>
-        <p:spPr>
-          <a:xfrm>
-            <a:off x="594360" y="4754880"/>
-            <a:ext cx="10972800" cy="1005840"/>
-          </a:xfrm>
-          <a:prstGeom prst="roundRect">
-            <a:avLst>
-              <a:gd name="adj" fmla="val 8182"/>
-            </a:avLst>
-          </a:prstGeom>
-          <a:solidFill>
-            <a:srgbClr val="FFFFFF"/>
-          </a:solidFill>
-          <a:ln w="12700">
-            <a:solidFill>
-              <a:srgbClr val="FFFFFF"/>
-            </a:solidFill>
-            <a:prstDash val="solid"/>
-          </a:ln>
-        </p:spPr>
-        <p:txBody>
-          <a:bodyPr/>
-          <a:p/>
-        </p:txBody>
-      </p:sp>
-      <p:sp>
-        <p:nvSpPr>
-          <p:cNvPr id="12" name="Text 10"/>
-          <p:cNvSpPr/>
-          <p:nvPr/>
-        </p:nvSpPr>
-        <p:spPr>
-          <a:xfrm>
-            <a:off x="868680" y="4919472"/>
-            <a:ext cx="10424160" cy="731520"/>
-          </a:xfrm>
-          <a:prstGeom prst="rect">
-            <a:avLst/>
-          </a:prstGeom>
-          <a:noFill/>
-          <a:ln/>
-        </p:spPr>
-        <p:txBody>
-          <a:bodyPr wrap="square" lIns="0" tIns="0" rIns="0" bIns="0" rtlCol="0" anchor="t"/>
-          <a:lstStyle/>
-          <a:p>
-            <a:pPr algn="l" indent="0" marL="0">
-              <a:lnSpc>
-                <a:spcPts val="1900"/>
-              </a:lnSpc>
-              <a:buNone/>
-            </a:pPr>
-            <a:r>
-              <a:rPr lang="en-US" sz="1400" dirty="0">
-                <a:solidFill>
-                  <a:srgbClr val="11121A"/>
-                </a:solidFill>
-                <a:latin typeface="Palatino Linotype" pitchFamily="34" charset="0"/>
-                <a:ea typeface="Palatino Linotype" pitchFamily="34" charset="-122"/>
-                <a:cs typeface="Palatino Linotype" pitchFamily="34" charset="-120"/>
-              </a:rPr>
-              <a:t>De ce acest criteriu cântărește cât fiecare dintre celelalte trei: în practica dumneavoastră veți întâlni frecvent dovezi care vă contrazic. Capacitatea de a le integra fără a abandona poziția și fără a le ignora este una dintre competențele pe care cursul le formează.</a:t>
-            </a:r>
-            <a:endParaRPr lang="en-US" sz="1400" dirty="0"/>
-          </a:p>
-        </p:txBody>
-      </p:sp>
-    </p:spTree>
-  </p:cSld>
-  <p:clrMapOvr>
-    <a:masterClrMapping/>
-  </p:clrMapOvr>
-</p:sld>
-</file>
-
-<file path=ppt/slides/slide52.xml><?xml version="1.0" encoding="utf-8"?>
-<p:sld xmlns:a="http://schemas.openxmlformats.org/drawingml/2006/main" xmlns:r="http://schemas.openxmlformats.org/officeDocument/2006/relationships" xmlns:p="http://schemas.openxmlformats.org/presentationml/2006/main">
   <p:cSld name="Slide 50">
     <p:bg>
       <p:bgPr>
@@ -34007,7 +32372,7 @@
                 <a:ea typeface="Palatino Linotype" pitchFamily="34" charset="-122"/>
                 <a:cs typeface="Palatino Linotype" pitchFamily="34" charset="-120"/>
               </a:rPr>
-              <a:t>40% DIN NOTA FINALĂ</a:t>
+              <a:t>60% DIN NOTA FINALĂ</a:t>
             </a:r>
             <a:endParaRPr lang="en-US" sz="1100" dirty="0"/>
           </a:p>
@@ -34046,7 +32411,7 @@
                 <a:ea typeface="Palatino Linotype" pitchFamily="34" charset="-122"/>
                 <a:cs typeface="Palatino Linotype" pitchFamily="34" charset="-120"/>
               </a:rPr>
-              <a:t>Investigația documentară individuală</a:t>
+              <a:t>Analiza unei știri, pe o pagină</a:t>
             </a:r>
             <a:endParaRPr lang="en-US" sz="3100" dirty="0"/>
           </a:p>
@@ -34085,7 +32450,7 @@
                 <a:ea typeface="Palatino Linotype" pitchFamily="34" charset="-122"/>
                 <a:cs typeface="Palatino Linotype" pitchFamily="34" charset="-120"/>
               </a:rPr>
-              <a:t>Trei până la cinci pagini, plus referințe, despre un caz documentat public de corupție în sistemul de sănătate din România. Ghidul se distribuie astăzi.</a:t>
+              <a:t>O știre reală despre corupție în sănătate: ce este stabilit, ce este relatat, ce este nedovedit și ce ați face voi, ca medici. O predați în ședința a șasea.</a:t>
             </a:r>
             <a:endParaRPr lang="en-US" sz="1450" dirty="0"/>
           </a:p>
@@ -34200,7 +32565,7 @@
                 <a:ea typeface="Palatino Linotype" pitchFamily="34" charset="-122"/>
                 <a:cs typeface="Palatino Linotype" pitchFamily="34" charset="-120"/>
               </a:rPr>
-              <a:t>Pentru fiecare afirmație de fapt din lucrare trebuie să fie evident în care dintre cele trei statute se află; separarea lor corectă este unul dintre criteriile de evaluare.</a:t>
+              <a:t>Pentru fiecare afirmație de fapt din analiză trebuie să fie evident în care dintre cele trei situații se află. Cazul de astăzi, „jumătate dintre pacienți plătesc”, este un model: aceeași separare între ce se știe, ce se relatează și ce nu s-a dovedit.</a:t>
             </a:r>
             <a:endParaRPr lang="en-US" sz="1500" dirty="0"/>
           </a:p>
@@ -34388,7 +32753,7 @@
                 <a:ea typeface="Palatino Linotype" pitchFamily="34" charset="-122"/>
                 <a:cs typeface="Palatino Linotype" pitchFamily="34" charset="-120"/>
               </a:rPr>
-              <a:t>RAPORTAT</a:t>
+              <a:t>RELATAT</a:t>
             </a:r>
             <a:endParaRPr lang="en-US" sz="1600" dirty="0"/>
           </a:p>
@@ -34503,7 +32868,7 @@
                 <a:ea typeface="Palatino Linotype" pitchFamily="34" charset="-122"/>
                 <a:cs typeface="Palatino Linotype" pitchFamily="34" charset="-120"/>
               </a:rPr>
-              <a:t>NEPROBAT</a:t>
+              <a:t>NEDOVEDIT</a:t>
             </a:r>
             <a:endParaRPr lang="en-US" sz="1600" dirty="0"/>
           </a:p>
@@ -34584,7 +32949,7 @@
                 <a:ea typeface="Palatino Linotype" pitchFamily="34" charset="-122"/>
                 <a:cs typeface="Palatino Linotype" pitchFamily="34" charset="-120"/>
               </a:rPr>
-              <a:t>Criteriile de evaluare: fișa disciplinei și notele de curs, la contractul de evaluare.</a:t>
+              <a:t>Regulile de evaluare: notele de curs, „Cum sunteți evaluați”.</a:t>
             </a:r>
             <a:endParaRPr lang="en-US" sz="950" dirty="0"/>
           </a:p>
@@ -34598,7 +32963,7 @@
 </p:sld>
 </file>
 
-<file path=ppt/slides/slide53.xml><?xml version="1.0" encoding="utf-8"?>
+<file path=ppt/slides/slide51.xml><?xml version="1.0" encoding="utf-8"?>
 <p:sld xmlns:a="http://schemas.openxmlformats.org/drawingml/2006/main" xmlns:r="http://schemas.openxmlformats.org/officeDocument/2006/relationships" xmlns:p="http://schemas.openxmlformats.org/presentationml/2006/main">
   <p:cSld name="Slide 51">
     <p:bg>
@@ -35411,7 +33776,7 @@
 </p:sld>
 </file>
 
-<file path=ppt/slides/slide54.xml><?xml version="1.0" encoding="utf-8"?>
+<file path=ppt/slides/slide52.xml><?xml version="1.0" encoding="utf-8"?>
 <p:sld xmlns:a="http://schemas.openxmlformats.org/drawingml/2006/main" xmlns:r="http://schemas.openxmlformats.org/officeDocument/2006/relationships" xmlns:p="http://schemas.openxmlformats.org/presentationml/2006/main">
   <p:cSld name="Slide 52">
     <p:bg>
@@ -35468,7 +33833,7 @@
                 <a:ea typeface="Palatino Linotype" pitchFamily="34" charset="-122"/>
                 <a:cs typeface="Palatino Linotype" pitchFamily="34" charset="-120"/>
               </a:rPr>
-              <a:t>CONTRACTUL CURSULUI, APLICAT MIE</a:t>
+              <a:t>REGULA CURSULUI, APLICATĂ MIE</a:t>
             </a:r>
             <a:endParaRPr lang="en-US" sz="1100" dirty="0"/>
           </a:p>
@@ -36210,7 +34575,7 @@
                 <a:ea typeface="Palatino Linotype" pitchFamily="34" charset="-122"/>
                 <a:cs typeface="Palatino Linotype" pitchFamily="34" charset="-120"/>
               </a:rPr>
-              <a:t>Un punct la portofoliu pentru oricine aduce oricare dintre ele, cu sursa primară și captura de ecran. Valoarea adusă se adaugă pe acest diapozitiv, CU NUMELE DUMNEAVOASTRĂ, pentru susținerile următoare. Este singurul mecanism prin care o valoare adusă de dumneavoastră se adaugă în material, cu numele dumneavoastră.</a:t>
+              <a:t>Recunoaștere publică, fără notă, pentru oricine aduce oricare dintre ele, cu sursa primară și captura de ecran: valoarea adusă se adaugă în material, cu numele vostru pe diapozitiv, lângă valoare.</a:t>
             </a:r>
             <a:endParaRPr lang="en-US" sz="1400" dirty="0"/>
           </a:p>
@@ -36224,7 +34589,7 @@
 </p:sld>
 </file>
 
-<file path=ppt/slides/slide55.xml><?xml version="1.0" encoding="utf-8"?>
+<file path=ppt/slides/slide53.xml><?xml version="1.0" encoding="utf-8"?>
 <p:sld xmlns:a="http://schemas.openxmlformats.org/drawingml/2006/main" xmlns:r="http://schemas.openxmlformats.org/officeDocument/2006/relationships" xmlns:p="http://schemas.openxmlformats.org/presentationml/2006/main">
   <p:cSld name="Slide 53">
     <p:bg>
@@ -36695,7 +35060,7 @@
 </p:sld>
 </file>
 
-<file path=ppt/slides/slide56.xml><?xml version="1.0" encoding="utf-8"?>
+<file path=ppt/slides/slide54.xml><?xml version="1.0" encoding="utf-8"?>
 <p:sld xmlns:a="http://schemas.openxmlformats.org/drawingml/2006/main" xmlns:r="http://schemas.openxmlformats.org/officeDocument/2006/relationships" xmlns:p="http://schemas.openxmlformats.org/presentationml/2006/main">
   <p:cSld name="Slide 54">
     <p:bg>
@@ -37678,7 +36043,7 @@
 </p:sld>
 </file>
 
-<file path=ppt/slides/slide57.xml><?xml version="1.0" encoding="utf-8"?>
+<file path=ppt/slides/slide55.xml><?xml version="1.0" encoding="utf-8"?>
 <p:sld xmlns:a="http://schemas.openxmlformats.org/drawingml/2006/main" xmlns:r="http://schemas.openxmlformats.org/officeDocument/2006/relationships" xmlns:p="http://schemas.openxmlformats.org/presentationml/2006/main">
   <p:cSld name="Slide 55">
     <p:bg>
@@ -37876,7 +36241,7 @@
                 <a:ea typeface="Palatino Linotype" pitchFamily="34" charset="-122"/>
                 <a:cs typeface="Palatino Linotype" pitchFamily="34" charset="-120"/>
               </a:rPr>
-              <a:t>FIȘA DE REFLECȚIE</a:t>
+              <a:t>BILETUL DE IEȘIRE</a:t>
             </a:r>
             <a:endParaRPr lang="en-US" sz="1400" dirty="0"/>
           </a:p>
@@ -37918,7 +36283,7 @@
                 <a:ea typeface="Palatino Linotype" pitchFamily="34" charset="-122"/>
                 <a:cs typeface="Palatino Linotype" pitchFamily="34" charset="-120"/>
               </a:rPr>
-              <a:t>Se completează la final și se predă la ieșire. Doi itemi scriși. Nu se notează; intră la portofoliu.</a:t>
+              <a:t>Trei întrebări deschise, anonim, pe telefon: ce a fost util, unde v-am pierdut, ce ați putea folosi mâine. Nu se notează.</a:t>
             </a:r>
             <a:endParaRPr lang="en-US" sz="1350" dirty="0"/>
           </a:p>
@@ -38020,7 +36385,7 @@
                 <a:ea typeface="Palatino Linotype" pitchFamily="34" charset="-122"/>
                 <a:cs typeface="Palatino Linotype" pitchFamily="34" charset="-120"/>
               </a:rPr>
-              <a:t>GHIDUL INVESTIGAȚIEI</a:t>
+              <a:t>ANALIZA DE ȘTIRE</a:t>
             </a:r>
             <a:endParaRPr lang="en-US" sz="1400" dirty="0"/>
           </a:p>
@@ -38062,7 +36427,7 @@
                 <a:ea typeface="Palatino Linotype" pitchFamily="34" charset="-122"/>
                 <a:cs typeface="Palatino Linotype" pitchFamily="34" charset="-120"/>
               </a:rPr>
-              <a:t>Lista de cazuri recomandate, structura și grila de evaluare — luați-le astăzi de pe masă.</a:t>
+              <a:t>60% din notă, pe o pagină, predată în ședința a șasea.</a:t>
             </a:r>
             <a:endParaRPr lang="en-US" sz="1350" dirty="0"/>
           </a:p>
@@ -38164,7 +36529,7 @@
                 <a:ea typeface="Palatino Linotype" pitchFamily="34" charset="-122"/>
                 <a:cs typeface="Palatino Linotype" pitchFamily="34" charset="-120"/>
               </a:rPr>
-              <a:t>UN PUNCT LA PORTOFOLIU</a:t>
+              <a:t>RECUNOAȘTERE PUBLICĂ</a:t>
             </a:r>
             <a:endParaRPr lang="en-US" sz="1400" dirty="0"/>
           </a:p>
@@ -38206,7 +36571,7 @@
                 <a:ea typeface="Palatino Linotype" pitchFamily="34" charset="-122"/>
                 <a:cs typeface="Palatino Linotype" pitchFamily="34" charset="-120"/>
               </a:rPr>
-              <a:t>Pentru oricine aduce una dintre valorile neverificate, cu sursa primară și captura de ecran.</a:t>
+              <a:t>Valoarea adusă de voi, cu sursa primară și captura de ecran, intră pe diapozitiv, cu numele vostru, fără notă.</a:t>
             </a:r>
             <a:endParaRPr lang="en-US" sz="1350" dirty="0"/>
           </a:p>
@@ -38259,7 +36624,7 @@
 </p:sld>
 </file>
 
-<file path=ppt/slides/slide58.xml><?xml version="1.0" encoding="utf-8"?>
+<file path=ppt/slides/slide56.xml><?xml version="1.0" encoding="utf-8"?>
 <p:sld xmlns:a="http://schemas.openxmlformats.org/drawingml/2006/main" xmlns:r="http://schemas.openxmlformats.org/officeDocument/2006/relationships" xmlns:p="http://schemas.openxmlformats.org/presentationml/2006/main">
   <p:cSld name="Slide 56">
     <p:bg>
@@ -38528,6 +36893,597 @@
                 <a:cs typeface="Palatino Linotype" pitchFamily="34" charset="-120"/>
               </a:rPr>
               <a:t>Patru întrebări. Treizeci de secunde. Se aplică oricărei cifre pe care o veți întâlni în următorii patruzeci de ani de practică, inclusiv celor pe care vi le voi da eu.</a:t>
+            </a:r>
+            <a:endParaRPr lang="en-US" sz="1700" dirty="0"/>
+          </a:p>
+        </p:txBody>
+      </p:sp>
+    </p:spTree>
+  </p:cSld>
+  <p:clrMapOvr>
+    <a:masterClrMapping/>
+  </p:clrMapOvr>
+</p:sld>
+</file>
+
+<file path=ppt/slides/slide57.xml><?xml version="1.0" encoding="utf-8"?>
+<p:sld xmlns:a="http://schemas.openxmlformats.org/drawingml/2006/main" xmlns:p="http://schemas.openxmlformats.org/presentationml/2006/main" xmlns:r="http://schemas.openxmlformats.org/officeDocument/2006/relationships">
+  <p:cSld>
+    <p:bg>
+      <p:bgPr>
+        <a:solidFill>
+          <a:srgbClr val="07564B"/>
+        </a:solidFill>
+      </p:bgPr>
+    </p:bg>
+    <p:spTree>
+      <p:nvGrpSpPr>
+        <p:cNvPr id="1" name=""/>
+        <p:cNvGrpSpPr/>
+        <p:nvPr/>
+      </p:nvGrpSpPr>
+      <p:grpSpPr/>
+      <p:sp>
+        <p:nvSpPr>
+          <p:cNvPr id="2" name="Shape 0"/>
+          <p:cNvSpPr/>
+          <p:nvPr/>
+        </p:nvSpPr>
+        <p:spPr>
+          <a:xfrm>
+            <a:off x="594360" y="384048"/>
+            <a:ext cx="2194560" cy="310896"/>
+          </a:xfrm>
+          <a:prstGeom prst="roundRect">
+            <a:avLst>
+              <a:gd name="adj" fmla="val 50000"/>
+            </a:avLst>
+          </a:prstGeom>
+          <a:solidFill>
+            <a:srgbClr val="FFFFFF"/>
+          </a:solidFill>
+          <a:ln w="12700">
+            <a:solidFill>
+              <a:srgbClr val="FFFFFF"/>
+            </a:solidFill>
+            <a:prstDash val="solid"/>
+          </a:ln>
+        </p:spPr>
+        <p:txBody>
+          <a:bodyPr/>
+          <a:p/>
+        </p:txBody>
+      </p:sp>
+      <p:sp>
+        <p:nvSpPr>
+          <p:cNvPr id="3" name="Text 1"/>
+          <p:cNvSpPr/>
+          <p:nvPr/>
+        </p:nvSpPr>
+        <p:spPr>
+          <a:xfrm>
+            <a:off x="594360" y="384048"/>
+            <a:ext cx="2194560" cy="310896"/>
+          </a:xfrm>
+          <a:prstGeom prst="rect">
+            <a:avLst/>
+          </a:prstGeom>
+          <a:noFill/>
+          <a:ln/>
+        </p:spPr>
+        <p:txBody>
+          <a:bodyPr wrap="square" lIns="0" tIns="0" rIns="0" bIns="0" rtlCol="0" anchor="ctr"/>
+          <a:lstStyle/>
+          <a:p>
+            <a:pPr algn="ctr" indent="0" marL="0">
+              <a:buNone/>
+            </a:pPr>
+            <a:r>
+              <a:rPr lang="en-US" sz="1000" b="1" dirty="0">
+                <a:solidFill>
+                  <a:srgbClr val="07564B"/>
+                </a:solidFill>
+                <a:latin typeface="Palatino Linotype" pitchFamily="34" charset="0"/>
+                <a:ea typeface="Palatino Linotype" pitchFamily="34" charset="-122"/>
+                <a:cs typeface="Palatino Linotype" pitchFamily="34" charset="-120"/>
+              </a:rPr>
+              <a:t>BILETUL DE IEȘIRE</a:t>
+            </a:r>
+            <a:endParaRPr lang="en-US" sz="1000" dirty="0"/>
+          </a:p>
+        </p:txBody>
+      </p:sp>
+      <p:sp>
+        <p:nvSpPr>
+          <p:cNvPr id="4" name="Text 2"/>
+          <p:cNvSpPr/>
+          <p:nvPr/>
+        </p:nvSpPr>
+        <p:spPr>
+          <a:xfrm>
+            <a:off x="594360" y="1143000"/>
+            <a:ext cx="10972800" cy="731520"/>
+          </a:xfrm>
+          <a:prstGeom prst="rect">
+            <a:avLst/>
+          </a:prstGeom>
+          <a:noFill/>
+          <a:ln/>
+        </p:spPr>
+        <p:txBody>
+          <a:bodyPr wrap="square" lIns="0" tIns="0" rIns="0" bIns="0" rtlCol="0" anchor="ctr"/>
+          <a:lstStyle/>
+          <a:p>
+            <a:pPr indent="0" marL="0">
+              <a:buNone/>
+            </a:pPr>
+            <a:r>
+              <a:rPr lang="en-US" sz="3100" b="1" dirty="0">
+                <a:solidFill>
+                  <a:srgbClr val="FFFFFF"/>
+                </a:solidFill>
+                <a:latin typeface="Palatino Linotype" pitchFamily="34" charset="0"/>
+                <a:ea typeface="Palatino Linotype" pitchFamily="34" charset="-122"/>
+                <a:cs typeface="Palatino Linotype" pitchFamily="34" charset="-120"/>
+              </a:rPr>
+              <a:t>Trei întrebări, anonim,</a:t>
+            </a:r>
+            <a:endParaRPr lang="en-US" sz="3100" dirty="0"/>
+          </a:p>
+        </p:txBody>
+      </p:sp>
+      <p:sp>
+        <p:nvSpPr>
+          <p:cNvPr id="5" name="Text 3"/>
+          <p:cNvSpPr/>
+          <p:nvPr/>
+        </p:nvSpPr>
+        <p:spPr>
+          <a:xfrm>
+            <a:off x="594360" y="1874520"/>
+            <a:ext cx="10972800" cy="731520"/>
+          </a:xfrm>
+          <a:prstGeom prst="rect">
+            <a:avLst/>
+          </a:prstGeom>
+          <a:noFill/>
+          <a:ln/>
+        </p:spPr>
+        <p:txBody>
+          <a:bodyPr wrap="square" lIns="0" tIns="0" rIns="0" bIns="0" rtlCol="0" anchor="ctr"/>
+          <a:lstStyle/>
+          <a:p>
+            <a:pPr indent="0" marL="0">
+              <a:buNone/>
+            </a:pPr>
+            <a:r>
+              <a:rPr lang="en-US" sz="3100" b="1" dirty="0">
+                <a:solidFill>
+                  <a:srgbClr val="7FE8D8"/>
+                </a:solidFill>
+                <a:latin typeface="Palatino Linotype" pitchFamily="34" charset="0"/>
+                <a:ea typeface="Palatino Linotype" pitchFamily="34" charset="-122"/>
+                <a:cs typeface="Palatino Linotype" pitchFamily="34" charset="-120"/>
+              </a:rPr>
+              <a:t>pe telefon</a:t>
+            </a:r>
+            <a:endParaRPr lang="en-US" sz="3100" dirty="0"/>
+          </a:p>
+        </p:txBody>
+      </p:sp>
+      <p:sp>
+        <p:nvSpPr>
+          <p:cNvPr id="6" name="Shape 4"/>
+          <p:cNvSpPr/>
+          <p:nvPr/>
+        </p:nvSpPr>
+        <p:spPr>
+          <a:xfrm>
+            <a:off x="594360" y="3063240"/>
+            <a:ext cx="3529584" cy="1600200"/>
+          </a:xfrm>
+          <a:prstGeom prst="roundRect">
+            <a:avLst>
+              <a:gd name="adj" fmla="val 5143"/>
+            </a:avLst>
+          </a:prstGeom>
+          <a:solidFill>
+            <a:srgbClr val="0A6456"/>
+          </a:solidFill>
+          <a:ln w="12700">
+            <a:solidFill>
+              <a:srgbClr val="0A6456"/>
+            </a:solidFill>
+            <a:prstDash val="solid"/>
+          </a:ln>
+        </p:spPr>
+        <p:txBody>
+          <a:bodyPr/>
+          <a:p/>
+        </p:txBody>
+      </p:sp>
+      <p:sp>
+        <p:nvSpPr>
+          <p:cNvPr id="7" name="Text 5"/>
+          <p:cNvSpPr/>
+          <p:nvPr/>
+        </p:nvSpPr>
+        <p:spPr>
+          <a:xfrm>
+            <a:off x="868680" y="3246120"/>
+            <a:ext cx="2980944" cy="320040"/>
+          </a:xfrm>
+          <a:prstGeom prst="rect">
+            <a:avLst/>
+          </a:prstGeom>
+          <a:noFill/>
+          <a:ln/>
+        </p:spPr>
+        <p:txBody>
+          <a:bodyPr wrap="square" lIns="0" tIns="0" rIns="0" bIns="0" rtlCol="0" anchor="t"/>
+          <a:lstStyle/>
+          <a:p>
+            <a:pPr algn="l" indent="0" marL="0">
+              <a:lnSpc>
+                <a:spcPts val="1800"/>
+              </a:lnSpc>
+              <a:buNone/>
+            </a:pPr>
+            <a:r>
+              <a:rPr lang="en-US" sz="1300" b="1" dirty="0">
+                <a:solidFill>
+                  <a:srgbClr val="FFFFFF"/>
+                </a:solidFill>
+                <a:latin typeface="Palatino Linotype" pitchFamily="34" charset="0"/>
+                <a:ea typeface="Palatino Linotype" pitchFamily="34" charset="-122"/>
+                <a:cs typeface="Palatino Linotype" pitchFamily="34" charset="-120"/>
+              </a:rPr>
+              <a:t>CE A FOST UTIL?</a:t>
+            </a:r>
+            <a:endParaRPr lang="en-US" sz="1300" dirty="0"/>
+          </a:p>
+        </p:txBody>
+      </p:sp>
+      <p:sp>
+        <p:nvSpPr>
+          <p:cNvPr id="8" name="Text 6"/>
+          <p:cNvSpPr/>
+          <p:nvPr/>
+        </p:nvSpPr>
+        <p:spPr>
+          <a:xfrm>
+            <a:off x="868680" y="3639312"/>
+            <a:ext cx="2980944" cy="868680"/>
+          </a:xfrm>
+          <a:prstGeom prst="rect">
+            <a:avLst/>
+          </a:prstGeom>
+          <a:noFill/>
+          <a:ln/>
+        </p:spPr>
+        <p:txBody>
+          <a:bodyPr wrap="square" lIns="0" tIns="0" rIns="0" bIns="0" rtlCol="0" anchor="t"/>
+          <a:lstStyle/>
+          <a:p>
+            <a:pPr algn="l" indent="0" marL="0">
+              <a:lnSpc>
+                <a:spcPts val="1900"/>
+              </a:lnSpc>
+              <a:buNone/>
+            </a:pPr>
+            <a:r>
+              <a:rPr lang="en-US" sz="1300" dirty="0">
+                <a:solidFill>
+                  <a:srgbClr val="A8DED4"/>
+                </a:solidFill>
+                <a:latin typeface="Palatino Linotype" pitchFamily="34" charset="0"/>
+                <a:ea typeface="Palatino Linotype" pitchFamily="34" charset="-122"/>
+                <a:cs typeface="Palatino Linotype" pitchFamily="34" charset="-120"/>
+              </a:rPr>
+              <a:t>răspuns deschis, anonim</a:t>
+            </a:r>
+            <a:endParaRPr lang="en-US" sz="1300" dirty="0"/>
+          </a:p>
+        </p:txBody>
+      </p:sp>
+      <p:sp>
+        <p:nvSpPr>
+          <p:cNvPr id="9" name="Shape 7"/>
+          <p:cNvSpPr/>
+          <p:nvPr/>
+        </p:nvSpPr>
+        <p:spPr>
+          <a:xfrm>
+            <a:off x="4315968" y="3063240"/>
+            <a:ext cx="3529584" cy="1600200"/>
+          </a:xfrm>
+          <a:prstGeom prst="roundRect">
+            <a:avLst>
+              <a:gd name="adj" fmla="val 5143"/>
+            </a:avLst>
+          </a:prstGeom>
+          <a:solidFill>
+            <a:srgbClr val="0A6456"/>
+          </a:solidFill>
+          <a:ln w="12700">
+            <a:solidFill>
+              <a:srgbClr val="0A6456"/>
+            </a:solidFill>
+            <a:prstDash val="solid"/>
+          </a:ln>
+        </p:spPr>
+        <p:txBody>
+          <a:bodyPr/>
+          <a:p/>
+        </p:txBody>
+      </p:sp>
+      <p:sp>
+        <p:nvSpPr>
+          <p:cNvPr id="10" name="Text 8"/>
+          <p:cNvSpPr/>
+          <p:nvPr/>
+        </p:nvSpPr>
+        <p:spPr>
+          <a:xfrm>
+            <a:off x="4590288" y="3246120"/>
+            <a:ext cx="2980944" cy="320040"/>
+          </a:xfrm>
+          <a:prstGeom prst="rect">
+            <a:avLst/>
+          </a:prstGeom>
+          <a:noFill/>
+          <a:ln/>
+        </p:spPr>
+        <p:txBody>
+          <a:bodyPr wrap="square" lIns="0" tIns="0" rIns="0" bIns="0" rtlCol="0" anchor="t"/>
+          <a:lstStyle/>
+          <a:p>
+            <a:pPr algn="l" indent="0" marL="0">
+              <a:lnSpc>
+                <a:spcPts val="1800"/>
+              </a:lnSpc>
+              <a:buNone/>
+            </a:pPr>
+            <a:r>
+              <a:rPr lang="en-US" sz="1300" b="1" dirty="0">
+                <a:solidFill>
+                  <a:srgbClr val="FFFFFF"/>
+                </a:solidFill>
+                <a:latin typeface="Palatino Linotype" pitchFamily="34" charset="0"/>
+                <a:ea typeface="Palatino Linotype" pitchFamily="34" charset="-122"/>
+                <a:cs typeface="Palatino Linotype" pitchFamily="34" charset="-120"/>
+              </a:rPr>
+              <a:t>UNDE V-AM PIERDUT?</a:t>
+            </a:r>
+            <a:endParaRPr lang="en-US" sz="1300" dirty="0"/>
+          </a:p>
+        </p:txBody>
+      </p:sp>
+      <p:sp>
+        <p:nvSpPr>
+          <p:cNvPr id="11" name="Text 9"/>
+          <p:cNvSpPr/>
+          <p:nvPr/>
+        </p:nvSpPr>
+        <p:spPr>
+          <a:xfrm>
+            <a:off x="4590288" y="3639312"/>
+            <a:ext cx="2980944" cy="868680"/>
+          </a:xfrm>
+          <a:prstGeom prst="rect">
+            <a:avLst/>
+          </a:prstGeom>
+          <a:noFill/>
+          <a:ln/>
+        </p:spPr>
+        <p:txBody>
+          <a:bodyPr wrap="square" lIns="0" tIns="0" rIns="0" bIns="0" rtlCol="0" anchor="t"/>
+          <a:lstStyle/>
+          <a:p>
+            <a:pPr algn="l" indent="0" marL="0">
+              <a:lnSpc>
+                <a:spcPts val="1900"/>
+              </a:lnSpc>
+              <a:buNone/>
+            </a:pPr>
+            <a:r>
+              <a:rPr lang="en-US" sz="1300" dirty="0">
+                <a:solidFill>
+                  <a:srgbClr val="A8DED4"/>
+                </a:solidFill>
+                <a:latin typeface="Palatino Linotype" pitchFamily="34" charset="0"/>
+                <a:ea typeface="Palatino Linotype" pitchFamily="34" charset="-122"/>
+                <a:cs typeface="Palatino Linotype" pitchFamily="34" charset="-120"/>
+              </a:rPr>
+              <a:t>răspuns deschis, anonim</a:t>
+            </a:r>
+            <a:endParaRPr lang="en-US" sz="1300" dirty="0"/>
+          </a:p>
+        </p:txBody>
+      </p:sp>
+      <p:sp>
+        <p:nvSpPr>
+          <p:cNvPr id="12" name="Shape 10"/>
+          <p:cNvSpPr/>
+          <p:nvPr/>
+        </p:nvSpPr>
+        <p:spPr>
+          <a:xfrm>
+            <a:off x="8037576" y="3063240"/>
+            <a:ext cx="3529584" cy="1600200"/>
+          </a:xfrm>
+          <a:prstGeom prst="roundRect">
+            <a:avLst>
+              <a:gd name="adj" fmla="val 5143"/>
+            </a:avLst>
+          </a:prstGeom>
+          <a:solidFill>
+            <a:srgbClr val="0A6456"/>
+          </a:solidFill>
+          <a:ln w="12700">
+            <a:solidFill>
+              <a:srgbClr val="0A6456"/>
+            </a:solidFill>
+            <a:prstDash val="solid"/>
+          </a:ln>
+        </p:spPr>
+        <p:txBody>
+          <a:bodyPr/>
+          <a:p/>
+        </p:txBody>
+      </p:sp>
+      <p:sp>
+        <p:nvSpPr>
+          <p:cNvPr id="13" name="Text 11"/>
+          <p:cNvSpPr/>
+          <p:nvPr/>
+        </p:nvSpPr>
+        <p:spPr>
+          <a:xfrm>
+            <a:off x="8311896" y="3246120"/>
+            <a:ext cx="2980944" cy="320040"/>
+          </a:xfrm>
+          <a:prstGeom prst="rect">
+            <a:avLst/>
+          </a:prstGeom>
+          <a:noFill/>
+          <a:ln/>
+        </p:spPr>
+        <p:txBody>
+          <a:bodyPr wrap="square" lIns="0" tIns="0" rIns="0" bIns="0" rtlCol="0" anchor="t"/>
+          <a:lstStyle/>
+          <a:p>
+            <a:pPr algn="l" indent="0" marL="0">
+              <a:lnSpc>
+                <a:spcPts val="1800"/>
+              </a:lnSpc>
+              <a:buNone/>
+            </a:pPr>
+            <a:r>
+              <a:rPr lang="en-US" sz="1300" b="1" dirty="0">
+                <a:solidFill>
+                  <a:srgbClr val="FFFFFF"/>
+                </a:solidFill>
+                <a:latin typeface="Palatino Linotype" pitchFamily="34" charset="0"/>
+                <a:ea typeface="Palatino Linotype" pitchFamily="34" charset="-122"/>
+                <a:cs typeface="Palatino Linotype" pitchFamily="34" charset="-120"/>
+              </a:rPr>
+              <a:t>CE AȚI PUTEA FOLOSI MÂINE?</a:t>
+            </a:r>
+            <a:endParaRPr lang="en-US" sz="1300" dirty="0"/>
+          </a:p>
+        </p:txBody>
+      </p:sp>
+      <p:sp>
+        <p:nvSpPr>
+          <p:cNvPr id="14" name="Text 12"/>
+          <p:cNvSpPr/>
+          <p:nvPr/>
+        </p:nvSpPr>
+        <p:spPr>
+          <a:xfrm>
+            <a:off x="8311896" y="3639312"/>
+            <a:ext cx="2980944" cy="868680"/>
+          </a:xfrm>
+          <a:prstGeom prst="rect">
+            <a:avLst/>
+          </a:prstGeom>
+          <a:noFill/>
+          <a:ln/>
+        </p:spPr>
+        <p:txBody>
+          <a:bodyPr wrap="square" lIns="0" tIns="0" rIns="0" bIns="0" rtlCol="0" anchor="t"/>
+          <a:lstStyle/>
+          <a:p>
+            <a:pPr algn="l" indent="0" marL="0">
+              <a:lnSpc>
+                <a:spcPts val="1900"/>
+              </a:lnSpc>
+              <a:buNone/>
+            </a:pPr>
+            <a:r>
+              <a:rPr lang="en-US" sz="1300" dirty="0">
+                <a:solidFill>
+                  <a:srgbClr val="A8DED4"/>
+                </a:solidFill>
+                <a:latin typeface="Palatino Linotype" pitchFamily="34" charset="0"/>
+                <a:ea typeface="Palatino Linotype" pitchFamily="34" charset="-122"/>
+                <a:cs typeface="Palatino Linotype" pitchFamily="34" charset="-120"/>
+              </a:rPr>
+              <a:t>răspuns deschis, anonim</a:t>
+            </a:r>
+            <a:endParaRPr lang="en-US" sz="1300" dirty="0"/>
+          </a:p>
+        </p:txBody>
+      </p:sp>
+      <p:sp>
+        <p:nvSpPr>
+          <p:cNvPr id="15" name="Shape 13"/>
+          <p:cNvSpPr/>
+          <p:nvPr/>
+        </p:nvSpPr>
+        <p:spPr>
+          <a:xfrm>
+            <a:off x="594360" y="4892040"/>
+            <a:ext cx="10972800" cy="868680"/>
+          </a:xfrm>
+          <a:prstGeom prst="roundRect">
+            <a:avLst>
+              <a:gd name="adj" fmla="val 9474"/>
+            </a:avLst>
+          </a:prstGeom>
+          <a:solidFill>
+            <a:srgbClr val="0A6456"/>
+          </a:solidFill>
+          <a:ln w="12700">
+            <a:solidFill>
+              <a:srgbClr val="0A6456"/>
+            </a:solidFill>
+            <a:prstDash val="solid"/>
+          </a:ln>
+        </p:spPr>
+        <p:txBody>
+          <a:bodyPr/>
+          <a:p/>
+        </p:txBody>
+      </p:sp>
+      <p:sp>
+        <p:nvSpPr>
+          <p:cNvPr id="16" name="Text 14"/>
+          <p:cNvSpPr/>
+          <p:nvPr/>
+        </p:nvSpPr>
+        <p:spPr>
+          <a:xfrm>
+            <a:off x="868680" y="5047488"/>
+            <a:ext cx="10424160" cy="566928"/>
+          </a:xfrm>
+          <a:prstGeom prst="rect">
+            <a:avLst/>
+          </a:prstGeom>
+          <a:noFill/>
+          <a:ln/>
+        </p:spPr>
+        <p:txBody>
+          <a:bodyPr wrap="square" lIns="0" tIns="0" rIns="0" bIns="0" rtlCol="0" anchor="t"/>
+          <a:lstStyle/>
+          <a:p>
+            <a:pPr algn="l" indent="0" marL="0">
+              <a:lnSpc>
+                <a:spcPts val="2000"/>
+              </a:lnSpc>
+              <a:buNone/>
+            </a:pPr>
+            <a:r>
+              <a:rPr lang="en-US" sz="1700" b="1" dirty="0">
+                <a:solidFill>
+                  <a:srgbClr val="FFFFFF"/>
+                </a:solidFill>
+                <a:latin typeface="Palatino Linotype" pitchFamily="34" charset="0"/>
+                <a:ea typeface="Palatino Linotype" pitchFamily="34" charset="-122"/>
+                <a:cs typeface="Palatino Linotype" pitchFamily="34" charset="-120"/>
+              </a:rPr>
+              <a:t>La începutul săptămânii următoare se anunță două modificări făcute pe baza răspunsurilor.</a:t>
             </a:r>
             <a:endParaRPr lang="en-US" sz="1700" dirty="0"/>
           </a:p>
@@ -38809,7 +37765,7 @@
                 <a:ea typeface="Palatino Linotype" pitchFamily="34" charset="-122"/>
                 <a:cs typeface="Palatino Linotype" pitchFamily="34" charset="-120"/>
               </a:rPr>
-              <a:t>Ce numim corupție în sănătate: șapte procese care nu se însumează</a:t>
+              <a:t>Ce numim corupție în sănătate: șase categorii care nu se însumează</a:t>
             </a:r>
             <a:endParaRPr lang="en-US" sz="1400" dirty="0"/>
           </a:p>
@@ -39068,7 +38024,7 @@
                 <a:ea typeface="Palatino Linotype" pitchFamily="34" charset="-122"/>
                 <a:cs typeface="Palatino Linotype" pitchFamily="34" charset="-120"/>
               </a:rPr>
-              <a:t>Contractul de evaluare: grila, plicurile, investigația</a:t>
+              <a:t>Evaluarea: cele două componente, fără dezbateri notate</a:t>
             </a:r>
             <a:endParaRPr lang="en-US" sz="1400" dirty="0"/>
           </a:p>
@@ -39097,7 +38053,7 @@
                 <a:ea typeface="Palatino Linotype" pitchFamily="34" charset="-122"/>
                 <a:cs typeface="Palatino Linotype" pitchFamily="34" charset="-120"/>
               </a:rPr>
-              <a:t>Exercițiul în echipe, chestionarul de estimare, fișa de reflecție</a:t>
+              <a:t>Exercițiul în echipe, chestionarul de estimare, biletul de ieșire</a:t>
             </a:r>
             <a:endParaRPr lang="en-US" sz="1400" dirty="0"/>
           </a:p>
@@ -39112,6 +38068,335 @@
 </file>
 
 <file path=ppt/slides/slide7.xml><?xml version="1.0" encoding="utf-8"?>
+<p:sld xmlns:a="http://schemas.openxmlformats.org/drawingml/2006/main" xmlns:r="http://schemas.openxmlformats.org/officeDocument/2006/relationships" xmlns:p="http://schemas.openxmlformats.org/presentationml/2006/main">
+  <p:cSld name="Slide 8">
+    <p:bg>
+      <p:bgPr>
+        <a:solidFill>
+          <a:srgbClr val="9B7EF7"/>
+        </a:solidFill>
+      </p:bgPr>
+    </p:bg>
+    <p:spTree>
+      <p:nvGrpSpPr>
+        <p:cNvPr id="1" name=""/>
+        <p:cNvGrpSpPr/>
+        <p:nvPr/>
+      </p:nvGrpSpPr>
+      <p:grpSpPr>
+        <a:xfrm>
+          <a:off x="0" y="0"/>
+          <a:ext cx="0" cy="0"/>
+          <a:chOff x="0" y="0"/>
+          <a:chExt cx="0" cy="0"/>
+        </a:xfrm>
+      </p:grpSpPr>
+      <p:sp>
+        <p:nvSpPr>
+          <p:cNvPr id="2" name="Shape 0"/>
+          <p:cNvSpPr/>
+          <p:nvPr/>
+        </p:nvSpPr>
+        <p:spPr>
+          <a:xfrm>
+            <a:off x="594360" y="384048"/>
+            <a:ext cx="2651760" cy="310896"/>
+          </a:xfrm>
+          <a:prstGeom prst="roundRect">
+            <a:avLst>
+              <a:gd name="adj" fmla="val 50000"/>
+            </a:avLst>
+          </a:prstGeom>
+          <a:solidFill>
+            <a:srgbClr val="1F1040"/>
+          </a:solidFill>
+          <a:ln w="12700">
+            <a:solidFill>
+              <a:srgbClr val="1F1040"/>
+            </a:solidFill>
+            <a:prstDash val="solid"/>
+          </a:ln>
+        </p:spPr>
+        <p:txBody>
+          <a:bodyPr/>
+          <a:p/>
+        </p:txBody>
+      </p:sp>
+      <p:sp>
+        <p:nvSpPr>
+          <p:cNvPr id="3" name="Text 1"/>
+          <p:cNvSpPr/>
+          <p:nvPr/>
+        </p:nvSpPr>
+        <p:spPr>
+          <a:xfrm>
+            <a:off x="594360" y="384048"/>
+            <a:ext cx="2651760" cy="310896"/>
+          </a:xfrm>
+          <a:prstGeom prst="rect">
+            <a:avLst/>
+          </a:prstGeom>
+          <a:noFill/>
+          <a:ln/>
+        </p:spPr>
+        <p:txBody>
+          <a:bodyPr wrap="square" lIns="0" tIns="0" rIns="0" bIns="0" rtlCol="0" anchor="ctr"/>
+          <a:lstStyle/>
+          <a:p>
+            <a:pPr algn="ctr" indent="0" marL="0">
+              <a:buNone/>
+            </a:pPr>
+            <a:r>
+              <a:rPr lang="en-US" sz="1000" b="1" dirty="0">
+                <a:solidFill>
+                  <a:srgbClr val="9B7EF7"/>
+                </a:solidFill>
+                <a:latin typeface="Palatino Linotype" pitchFamily="34" charset="0"/>
+                <a:ea typeface="Palatino Linotype" pitchFamily="34" charset="-122"/>
+                <a:cs typeface="Palatino Linotype" pitchFamily="34" charset="-120"/>
+              </a:rPr>
+              <a:t>REGULA CARE NU SE NEGOCIAZĂ</a:t>
+            </a:r>
+            <a:endParaRPr lang="en-US" sz="1000" dirty="0"/>
+          </a:p>
+        </p:txBody>
+      </p:sp>
+      <p:sp>
+        <p:nvSpPr>
+          <p:cNvPr id="4" name="Text 2"/>
+          <p:cNvSpPr/>
+          <p:nvPr/>
+        </p:nvSpPr>
+        <p:spPr>
+          <a:xfrm>
+            <a:off x="594360" y="960120"/>
+            <a:ext cx="10972800" cy="777240"/>
+          </a:xfrm>
+          <a:prstGeom prst="rect">
+            <a:avLst/>
+          </a:prstGeom>
+          <a:noFill/>
+          <a:ln/>
+        </p:spPr>
+        <p:txBody>
+          <a:bodyPr wrap="square" lIns="0" tIns="0" rIns="0" bIns="0" rtlCol="0" anchor="ctr"/>
+          <a:lstStyle/>
+          <a:p>
+            <a:pPr indent="0" marL="0">
+              <a:buNone/>
+            </a:pPr>
+            <a:r>
+              <a:rPr lang="en-US" sz="3300" b="1" dirty="0">
+                <a:solidFill>
+                  <a:srgbClr val="1F1040"/>
+                </a:solidFill>
+                <a:latin typeface="Palatino Linotype" pitchFamily="34" charset="0"/>
+                <a:ea typeface="Palatino Linotype" pitchFamily="34" charset="-122"/>
+                <a:cs typeface="Palatino Linotype" pitchFamily="34" charset="-120"/>
+              </a:rPr>
+              <a:t>Nimeni nu raportează despre sine</a:t>
+            </a:r>
+            <a:endParaRPr lang="en-US" sz="3300" dirty="0"/>
+          </a:p>
+        </p:txBody>
+      </p:sp>
+      <p:sp>
+        <p:nvSpPr>
+          <p:cNvPr id="5" name="Shape 3"/>
+          <p:cNvSpPr/>
+          <p:nvPr/>
+        </p:nvSpPr>
+        <p:spPr>
+          <a:xfrm>
+            <a:off x="594360" y="1965960"/>
+            <a:ext cx="10972800" cy="1783080"/>
+          </a:xfrm>
+          <a:prstGeom prst="roundRect">
+            <a:avLst>
+              <a:gd name="adj" fmla="val 4615"/>
+            </a:avLst>
+          </a:prstGeom>
+          <a:solidFill>
+            <a:srgbClr val="FFFFFF"/>
+          </a:solidFill>
+          <a:ln w="12700">
+            <a:solidFill>
+              <a:srgbClr val="FFFFFF"/>
+            </a:solidFill>
+            <a:prstDash val="solid"/>
+          </a:ln>
+        </p:spPr>
+        <p:txBody>
+          <a:bodyPr/>
+          <a:p/>
+        </p:txBody>
+      </p:sp>
+      <p:sp>
+        <p:nvSpPr>
+          <p:cNvPr id="6" name="Text 4"/>
+          <p:cNvSpPr/>
+          <p:nvPr/>
+        </p:nvSpPr>
+        <p:spPr>
+          <a:xfrm>
+            <a:off x="868680" y="2148840"/>
+            <a:ext cx="10424160" cy="1463040"/>
+          </a:xfrm>
+          <a:prstGeom prst="rect">
+            <a:avLst/>
+          </a:prstGeom>
+          <a:noFill/>
+          <a:ln/>
+        </p:spPr>
+        <p:txBody>
+          <a:bodyPr wrap="square" lIns="0" tIns="0" rIns="0" bIns="0" rtlCol="0" anchor="t"/>
+          <a:lstStyle/>
+          <a:p>
+            <a:pPr algn="l" indent="0" marL="0">
+              <a:lnSpc>
+                <a:spcPts val="2200"/>
+              </a:lnSpc>
+              <a:buNone/>
+            </a:pPr>
+            <a:r>
+              <a:rPr lang="en-US" sz="1550" dirty="0">
+                <a:solidFill>
+                  <a:srgbClr val="11121A"/>
+                </a:solidFill>
+                <a:latin typeface="Palatino Linotype" pitchFamily="34" charset="0"/>
+                <a:ea typeface="Palatino Linotype" pitchFamily="34" charset="-122"/>
+                <a:cs typeface="Palatino Linotype" pitchFamily="34" charset="-120"/>
+              </a:rPr>
+              <a:t>Nicio activitate din acest curs nu vă cere să raportați despre dumneavoastră, despre familia dumneavoastră sau despre locul în care faceți practica. Voturile sunt voturi de opinie și de estimare. Studiile de caz privesc persoane descrise într-o vinietă, nu participanții.</a:t>
+            </a:r>
+            <a:endParaRPr lang="en-US" sz="1550" dirty="0"/>
+          </a:p>
+        </p:txBody>
+      </p:sp>
+      <p:sp>
+        <p:nvSpPr>
+          <p:cNvPr id="7" name="Shape 5"/>
+          <p:cNvSpPr/>
+          <p:nvPr/>
+        </p:nvSpPr>
+        <p:spPr>
+          <a:xfrm>
+            <a:off x="594360" y="3931920"/>
+            <a:ext cx="10972800" cy="1783080"/>
+          </a:xfrm>
+          <a:prstGeom prst="roundRect">
+            <a:avLst>
+              <a:gd name="adj" fmla="val 4615"/>
+            </a:avLst>
+          </a:prstGeom>
+          <a:solidFill>
+            <a:srgbClr val="6B4FC9"/>
+          </a:solidFill>
+          <a:ln w="12700">
+            <a:solidFill>
+              <a:srgbClr val="6B4FC9"/>
+            </a:solidFill>
+            <a:prstDash val="solid"/>
+          </a:ln>
+        </p:spPr>
+        <p:txBody>
+          <a:bodyPr/>
+          <a:p/>
+        </p:txBody>
+      </p:sp>
+      <p:sp>
+        <p:nvSpPr>
+          <p:cNvPr id="8" name="Text 6"/>
+          <p:cNvSpPr/>
+          <p:nvPr/>
+        </p:nvSpPr>
+        <p:spPr>
+          <a:xfrm>
+            <a:off x="868680" y="4096512"/>
+            <a:ext cx="10424160" cy="256032"/>
+          </a:xfrm>
+          <a:prstGeom prst="rect">
+            <a:avLst/>
+          </a:prstGeom>
+          <a:noFill/>
+          <a:ln/>
+        </p:spPr>
+        <p:txBody>
+          <a:bodyPr wrap="square" lIns="0" tIns="0" rIns="0" bIns="0" rtlCol="0" anchor="t"/>
+          <a:lstStyle/>
+          <a:p>
+            <a:pPr algn="l" indent="0" marL="0">
+              <a:lnSpc>
+                <a:spcPts val="1800"/>
+              </a:lnSpc>
+              <a:buNone/>
+            </a:pPr>
+            <a:r>
+              <a:rPr lang="en-US" sz="1000" b="1" spc="200" kern="0" dirty="0">
+                <a:solidFill>
+                  <a:srgbClr val="FFFFFF"/>
+                </a:solidFill>
+                <a:latin typeface="Palatino Linotype" pitchFamily="34" charset="0"/>
+                <a:ea typeface="Palatino Linotype" pitchFamily="34" charset="-122"/>
+                <a:cs typeface="Palatino Linotype" pitchFamily="34" charset="-120"/>
+              </a:rPr>
+              <a:t>DE CE</a:t>
+            </a:r>
+            <a:endParaRPr lang="en-US" sz="1000" dirty="0"/>
+          </a:p>
+        </p:txBody>
+      </p:sp>
+      <p:sp>
+        <p:nvSpPr>
+          <p:cNvPr id="9" name="Text 7"/>
+          <p:cNvSpPr/>
+          <p:nvPr/>
+        </p:nvSpPr>
+        <p:spPr>
+          <a:xfrm>
+            <a:off x="868680" y="4389120"/>
+            <a:ext cx="10424160" cy="1234440"/>
+          </a:xfrm>
+          <a:prstGeom prst="rect">
+            <a:avLst/>
+          </a:prstGeom>
+          <a:noFill/>
+          <a:ln/>
+        </p:spPr>
+        <p:txBody>
+          <a:bodyPr wrap="square" lIns="0" tIns="0" rIns="0" bIns="0" rtlCol="0" anchor="t"/>
+          <a:lstStyle/>
+          <a:p>
+            <a:pPr algn="l" indent="0" marL="0">
+              <a:lnSpc>
+                <a:spcPts val="2000"/>
+              </a:lnSpc>
+              <a:buNone/>
+            </a:pPr>
+            <a:r>
+              <a:rPr lang="en-US" sz="1400" dirty="0">
+                <a:solidFill>
+                  <a:srgbClr val="F0EBFF"/>
+                </a:solidFill>
+                <a:latin typeface="Palatino Linotype" pitchFamily="34" charset="0"/>
+                <a:ea typeface="Palatino Linotype" pitchFamily="34" charset="-122"/>
+                <a:cs typeface="Palatino Linotype" pitchFamily="34" charset="-120"/>
+              </a:rPr>
+              <a:t>Sunteți în anul al patrulea la medicină, într-un curs despre fapte cu relevanță disciplinară și penală, într-o sală în care vă cunoașteți colegii. Un vot anonim despre ce ați văzut personal ar funcționa, în aceste condiții, ca instrument de autoraportare deghizat. Efectul pedagogic urmărit se obține integral fără el.</a:t>
+            </a:r>
+            <a:endParaRPr lang="en-US" sz="1400" dirty="0"/>
+          </a:p>
+        </p:txBody>
+      </p:sp>
+    </p:spTree>
+  </p:cSld>
+  <p:clrMapOvr>
+    <a:masterClrMapping/>
+  </p:clrMapOvr>
+</p:sld>
+</file>
+
+<file path=ppt/slides/slide8.xml><?xml version="1.0" encoding="utf-8"?>
 <p:sld xmlns:a="http://schemas.openxmlformats.org/drawingml/2006/main" xmlns:r="http://schemas.openxmlformats.org/officeDocument/2006/relationships" xmlns:p="http://schemas.openxmlformats.org/presentationml/2006/main">
   <p:cSld name="Slide 7">
     <p:bg>
@@ -39678,335 +38963,6 @@
               <a:t>Niciunul dintre cele două voturi nu solicită experiența personală.</a:t>
             </a:r>
             <a:endParaRPr lang="en-US" sz="950" dirty="0"/>
-          </a:p>
-        </p:txBody>
-      </p:sp>
-    </p:spTree>
-  </p:cSld>
-  <p:clrMapOvr>
-    <a:masterClrMapping/>
-  </p:clrMapOvr>
-</p:sld>
-</file>
-
-<file path=ppt/slides/slide8.xml><?xml version="1.0" encoding="utf-8"?>
-<p:sld xmlns:a="http://schemas.openxmlformats.org/drawingml/2006/main" xmlns:r="http://schemas.openxmlformats.org/officeDocument/2006/relationships" xmlns:p="http://schemas.openxmlformats.org/presentationml/2006/main">
-  <p:cSld name="Slide 8">
-    <p:bg>
-      <p:bgPr>
-        <a:solidFill>
-          <a:srgbClr val="9B7EF7"/>
-        </a:solidFill>
-      </p:bgPr>
-    </p:bg>
-    <p:spTree>
-      <p:nvGrpSpPr>
-        <p:cNvPr id="1" name=""/>
-        <p:cNvGrpSpPr/>
-        <p:nvPr/>
-      </p:nvGrpSpPr>
-      <p:grpSpPr>
-        <a:xfrm>
-          <a:off x="0" y="0"/>
-          <a:ext cx="0" cy="0"/>
-          <a:chOff x="0" y="0"/>
-          <a:chExt cx="0" cy="0"/>
-        </a:xfrm>
-      </p:grpSpPr>
-      <p:sp>
-        <p:nvSpPr>
-          <p:cNvPr id="2" name="Shape 0"/>
-          <p:cNvSpPr/>
-          <p:nvPr/>
-        </p:nvSpPr>
-        <p:spPr>
-          <a:xfrm>
-            <a:off x="594360" y="384048"/>
-            <a:ext cx="2651760" cy="310896"/>
-          </a:xfrm>
-          <a:prstGeom prst="roundRect">
-            <a:avLst>
-              <a:gd name="adj" fmla="val 50000"/>
-            </a:avLst>
-          </a:prstGeom>
-          <a:solidFill>
-            <a:srgbClr val="1F1040"/>
-          </a:solidFill>
-          <a:ln w="12700">
-            <a:solidFill>
-              <a:srgbClr val="1F1040"/>
-            </a:solidFill>
-            <a:prstDash val="solid"/>
-          </a:ln>
-        </p:spPr>
-        <p:txBody>
-          <a:bodyPr/>
-          <a:p/>
-        </p:txBody>
-      </p:sp>
-      <p:sp>
-        <p:nvSpPr>
-          <p:cNvPr id="3" name="Text 1"/>
-          <p:cNvSpPr/>
-          <p:nvPr/>
-        </p:nvSpPr>
-        <p:spPr>
-          <a:xfrm>
-            <a:off x="594360" y="384048"/>
-            <a:ext cx="2651760" cy="310896"/>
-          </a:xfrm>
-          <a:prstGeom prst="rect">
-            <a:avLst/>
-          </a:prstGeom>
-          <a:noFill/>
-          <a:ln/>
-        </p:spPr>
-        <p:txBody>
-          <a:bodyPr wrap="square" lIns="0" tIns="0" rIns="0" bIns="0" rtlCol="0" anchor="ctr"/>
-          <a:lstStyle/>
-          <a:p>
-            <a:pPr algn="ctr" indent="0" marL="0">
-              <a:buNone/>
-            </a:pPr>
-            <a:r>
-              <a:rPr lang="en-US" sz="1000" b="1" dirty="0">
-                <a:solidFill>
-                  <a:srgbClr val="9B7EF7"/>
-                </a:solidFill>
-                <a:latin typeface="Palatino Linotype" pitchFamily="34" charset="0"/>
-                <a:ea typeface="Palatino Linotype" pitchFamily="34" charset="-122"/>
-                <a:cs typeface="Palatino Linotype" pitchFamily="34" charset="-120"/>
-              </a:rPr>
-              <a:t>REGULA CARE NU SE NEGOCIAZĂ</a:t>
-            </a:r>
-            <a:endParaRPr lang="en-US" sz="1000" dirty="0"/>
-          </a:p>
-        </p:txBody>
-      </p:sp>
-      <p:sp>
-        <p:nvSpPr>
-          <p:cNvPr id="4" name="Text 2"/>
-          <p:cNvSpPr/>
-          <p:nvPr/>
-        </p:nvSpPr>
-        <p:spPr>
-          <a:xfrm>
-            <a:off x="594360" y="960120"/>
-            <a:ext cx="10972800" cy="777240"/>
-          </a:xfrm>
-          <a:prstGeom prst="rect">
-            <a:avLst/>
-          </a:prstGeom>
-          <a:noFill/>
-          <a:ln/>
-        </p:spPr>
-        <p:txBody>
-          <a:bodyPr wrap="square" lIns="0" tIns="0" rIns="0" bIns="0" rtlCol="0" anchor="ctr"/>
-          <a:lstStyle/>
-          <a:p>
-            <a:pPr indent="0" marL="0">
-              <a:buNone/>
-            </a:pPr>
-            <a:r>
-              <a:rPr lang="en-US" sz="3300" b="1" dirty="0">
-                <a:solidFill>
-                  <a:srgbClr val="1F1040"/>
-                </a:solidFill>
-                <a:latin typeface="Palatino Linotype" pitchFamily="34" charset="0"/>
-                <a:ea typeface="Palatino Linotype" pitchFamily="34" charset="-122"/>
-                <a:cs typeface="Palatino Linotype" pitchFamily="34" charset="-120"/>
-              </a:rPr>
-              <a:t>Nimeni nu raportează despre sine</a:t>
-            </a:r>
-            <a:endParaRPr lang="en-US" sz="3300" dirty="0"/>
-          </a:p>
-        </p:txBody>
-      </p:sp>
-      <p:sp>
-        <p:nvSpPr>
-          <p:cNvPr id="5" name="Shape 3"/>
-          <p:cNvSpPr/>
-          <p:nvPr/>
-        </p:nvSpPr>
-        <p:spPr>
-          <a:xfrm>
-            <a:off x="594360" y="1965960"/>
-            <a:ext cx="10972800" cy="1783080"/>
-          </a:xfrm>
-          <a:prstGeom prst="roundRect">
-            <a:avLst>
-              <a:gd name="adj" fmla="val 4615"/>
-            </a:avLst>
-          </a:prstGeom>
-          <a:solidFill>
-            <a:srgbClr val="FFFFFF"/>
-          </a:solidFill>
-          <a:ln w="12700">
-            <a:solidFill>
-              <a:srgbClr val="FFFFFF"/>
-            </a:solidFill>
-            <a:prstDash val="solid"/>
-          </a:ln>
-        </p:spPr>
-        <p:txBody>
-          <a:bodyPr/>
-          <a:p/>
-        </p:txBody>
-      </p:sp>
-      <p:sp>
-        <p:nvSpPr>
-          <p:cNvPr id="6" name="Text 4"/>
-          <p:cNvSpPr/>
-          <p:nvPr/>
-        </p:nvSpPr>
-        <p:spPr>
-          <a:xfrm>
-            <a:off x="868680" y="2148840"/>
-            <a:ext cx="10424160" cy="1463040"/>
-          </a:xfrm>
-          <a:prstGeom prst="rect">
-            <a:avLst/>
-          </a:prstGeom>
-          <a:noFill/>
-          <a:ln/>
-        </p:spPr>
-        <p:txBody>
-          <a:bodyPr wrap="square" lIns="0" tIns="0" rIns="0" bIns="0" rtlCol="0" anchor="t"/>
-          <a:lstStyle/>
-          <a:p>
-            <a:pPr algn="l" indent="0" marL="0">
-              <a:lnSpc>
-                <a:spcPts val="2200"/>
-              </a:lnSpc>
-              <a:buNone/>
-            </a:pPr>
-            <a:r>
-              <a:rPr lang="en-US" sz="1550" dirty="0">
-                <a:solidFill>
-                  <a:srgbClr val="11121A"/>
-                </a:solidFill>
-                <a:latin typeface="Palatino Linotype" pitchFamily="34" charset="0"/>
-                <a:ea typeface="Palatino Linotype" pitchFamily="34" charset="-122"/>
-                <a:cs typeface="Palatino Linotype" pitchFamily="34" charset="-120"/>
-              </a:rPr>
-              <a:t>Nicio activitate din acest curs nu vă cere să raportați despre dumneavoastră, despre familia dumneavoastră sau despre locul în care faceți practica. Voturile sunt voturi de opinie și de estimare. Studiile de caz privesc persoane descrise într-o vinietă, nu participanții.</a:t>
-            </a:r>
-            <a:endParaRPr lang="en-US" sz="1550" dirty="0"/>
-          </a:p>
-        </p:txBody>
-      </p:sp>
-      <p:sp>
-        <p:nvSpPr>
-          <p:cNvPr id="7" name="Shape 5"/>
-          <p:cNvSpPr/>
-          <p:nvPr/>
-        </p:nvSpPr>
-        <p:spPr>
-          <a:xfrm>
-            <a:off x="594360" y="3931920"/>
-            <a:ext cx="10972800" cy="1783080"/>
-          </a:xfrm>
-          <a:prstGeom prst="roundRect">
-            <a:avLst>
-              <a:gd name="adj" fmla="val 4615"/>
-            </a:avLst>
-          </a:prstGeom>
-          <a:solidFill>
-            <a:srgbClr val="6B4FC9"/>
-          </a:solidFill>
-          <a:ln w="12700">
-            <a:solidFill>
-              <a:srgbClr val="6B4FC9"/>
-            </a:solidFill>
-            <a:prstDash val="solid"/>
-          </a:ln>
-        </p:spPr>
-        <p:txBody>
-          <a:bodyPr/>
-          <a:p/>
-        </p:txBody>
-      </p:sp>
-      <p:sp>
-        <p:nvSpPr>
-          <p:cNvPr id="8" name="Text 6"/>
-          <p:cNvSpPr/>
-          <p:nvPr/>
-        </p:nvSpPr>
-        <p:spPr>
-          <a:xfrm>
-            <a:off x="868680" y="4096512"/>
-            <a:ext cx="10424160" cy="256032"/>
-          </a:xfrm>
-          <a:prstGeom prst="rect">
-            <a:avLst/>
-          </a:prstGeom>
-          <a:noFill/>
-          <a:ln/>
-        </p:spPr>
-        <p:txBody>
-          <a:bodyPr wrap="square" lIns="0" tIns="0" rIns="0" bIns="0" rtlCol="0" anchor="t"/>
-          <a:lstStyle/>
-          <a:p>
-            <a:pPr algn="l" indent="0" marL="0">
-              <a:lnSpc>
-                <a:spcPts val="1800"/>
-              </a:lnSpc>
-              <a:buNone/>
-            </a:pPr>
-            <a:r>
-              <a:rPr lang="en-US" sz="1000" b="1" spc="200" kern="0" dirty="0">
-                <a:solidFill>
-                  <a:srgbClr val="FFFFFF"/>
-                </a:solidFill>
-                <a:latin typeface="Palatino Linotype" pitchFamily="34" charset="0"/>
-                <a:ea typeface="Palatino Linotype" pitchFamily="34" charset="-122"/>
-                <a:cs typeface="Palatino Linotype" pitchFamily="34" charset="-120"/>
-              </a:rPr>
-              <a:t>DE CE</a:t>
-            </a:r>
-            <a:endParaRPr lang="en-US" sz="1000" dirty="0"/>
-          </a:p>
-        </p:txBody>
-      </p:sp>
-      <p:sp>
-        <p:nvSpPr>
-          <p:cNvPr id="9" name="Text 7"/>
-          <p:cNvSpPr/>
-          <p:nvPr/>
-        </p:nvSpPr>
-        <p:spPr>
-          <a:xfrm>
-            <a:off x="868680" y="4389120"/>
-            <a:ext cx="10424160" cy="1234440"/>
-          </a:xfrm>
-          <a:prstGeom prst="rect">
-            <a:avLst/>
-          </a:prstGeom>
-          <a:noFill/>
-          <a:ln/>
-        </p:spPr>
-        <p:txBody>
-          <a:bodyPr wrap="square" lIns="0" tIns="0" rIns="0" bIns="0" rtlCol="0" anchor="t"/>
-          <a:lstStyle/>
-          <a:p>
-            <a:pPr algn="l" indent="0" marL="0">
-              <a:lnSpc>
-                <a:spcPts val="2000"/>
-              </a:lnSpc>
-              <a:buNone/>
-            </a:pPr>
-            <a:r>
-              <a:rPr lang="en-US" sz="1400" dirty="0">
-                <a:solidFill>
-                  <a:srgbClr val="F0EBFF"/>
-                </a:solidFill>
-                <a:latin typeface="Palatino Linotype" pitchFamily="34" charset="0"/>
-                <a:ea typeface="Palatino Linotype" pitchFamily="34" charset="-122"/>
-                <a:cs typeface="Palatino Linotype" pitchFamily="34" charset="-120"/>
-              </a:rPr>
-              <a:t>Sunteți în anul al patrulea la medicină, într-un curs despre fapte cu relevanță disciplinară și penală, într-o sală în care vă cunoașteți colegii. Un vot anonim despre ce ați văzut personal ar funcționa, în aceste condiții, ca instrument de autoraportare deghizat. Efectul pedagogic urmărit se obține integral fără el.</a:t>
-            </a:r>
-            <a:endParaRPr lang="en-US" sz="1400" dirty="0"/>
           </a:p>
         </p:txBody>
       </p:sp>
@@ -40075,7 +39031,7 @@
                 <a:ea typeface="Palatino Linotype" pitchFamily="34" charset="-122"/>
                 <a:cs typeface="Palatino Linotype" pitchFamily="34" charset="-120"/>
               </a:rPr>
-              <a:t>01</a:t>
+              <a:t>1</a:t>
             </a:r>
             <a:endParaRPr lang="en-US" sz="13500" dirty="0"/>
           </a:p>
